--- a/Sildes/Compile-BluePrint_AI_Final_PPT.pptx
+++ b/Sildes/Compile-BluePrint_AI_Final_PPT.pptx
@@ -10,7 +10,7 @@
   <p:sldIdLst>
     <p:sldId id="256" r:id="rId2"/>
     <p:sldId id="257" r:id="rId3"/>
-    <p:sldId id="258" r:id="rId4"/>
+    <p:sldId id="267" r:id="rId4"/>
     <p:sldId id="259" r:id="rId5"/>
     <p:sldId id="260" r:id="rId6"/>
     <p:sldId id="261" r:id="rId7"/>
@@ -380,93 +380,6 @@
           <a:p>
             <a:r>
               <a:rPr lang="en-US" dirty="0"/>
-              <a:t>Today Compile turns requirements into a blueprint. Next, we close the loop into delivery: generate Terraform and Kubernetes manifests from the cloud topology, and push requirements into Jira and GitHub as epics and stories. Longer term, one-click provisioning to the major clouds. Adjust the 'Shipped' list to match exactly what is live.</a:t>
-            </a:r>
-          </a:p>
-        </p:txBody>
-      </p:sp>
-      <p:sp>
-        <p:nvSpPr>
-          <p:cNvPr id="4" name="Slide Number Placeholder 3"/>
-          <p:cNvSpPr>
-            <a:spLocks noGrp="1"/>
-          </p:cNvSpPr>
-          <p:nvPr>
-            <p:ph type="sldNum" sz="quarter" idx="10"/>
-          </p:nvPr>
-        </p:nvSpPr>
-        <p:spPr/>
-        <p:txBody>
-          <a:bodyPr/>
-          <a:lstStyle/>
-          <a:p>
-            <a:fld id="{F7021451-1387-4CA6-816F-3879F97B5CBC}" type="slidenum">
-              <a:rPr lang="en-US"/>
-              <a:t>10</a:t>
-            </a:fld>
-            <a:endParaRPr lang="en-US"/>
-          </a:p>
-        </p:txBody>
-      </p:sp>
-    </p:spTree>
-    <p:extLst>
-      <p:ext uri="{BB962C8B-B14F-4D97-AF65-F5344CB8AC3E}">
-        <p14:creationId xmlns:p14="http://schemas.microsoft.com/office/powerpoint/2010/main" val="1024086991"/>
-      </p:ext>
-    </p:extLst>
-  </p:cSld>
-  <p:clrMapOvr>
-    <a:masterClrMapping/>
-  </p:clrMapOvr>
-</p:notes>
-</file>
-
-<file path=ppt/notesSlides/notesSlide11.xml><?xml version="1.0" encoding="utf-8"?>
-<p:notes xmlns:a="http://schemas.openxmlformats.org/drawingml/2006/main" xmlns:r="http://schemas.openxmlformats.org/officeDocument/2006/relationships" xmlns:p="http://schemas.openxmlformats.org/presentationml/2006/main">
-  <p:cSld>
-    <p:spTree>
-      <p:nvGrpSpPr>
-        <p:cNvPr id="1" name=""/>
-        <p:cNvGrpSpPr/>
-        <p:nvPr/>
-      </p:nvGrpSpPr>
-      <p:grpSpPr>
-        <a:xfrm>
-          <a:off x="0" y="0"/>
-          <a:ext cx="0" cy="0"/>
-          <a:chOff x="0" y="0"/>
-          <a:chExt cx="0" cy="0"/>
-        </a:xfrm>
-      </p:grpSpPr>
-      <p:sp>
-        <p:nvSpPr>
-          <p:cNvPr id="2" name="Slide Image Placeholder 1"/>
-          <p:cNvSpPr>
-            <a:spLocks noGrp="1" noRot="1" noChangeAspect="1"/>
-          </p:cNvSpPr>
-          <p:nvPr>
-            <p:ph type="sldImg"/>
-          </p:nvPr>
-        </p:nvSpPr>
-        <p:spPr/>
-      </p:sp>
-      <p:sp>
-        <p:nvSpPr>
-          <p:cNvPr id="3" name="Notes Placeholder 2"/>
-          <p:cNvSpPr>
-            <a:spLocks noGrp="1"/>
-          </p:cNvSpPr>
-          <p:nvPr>
-            <p:ph type="body" idx="1"/>
-          </p:nvPr>
-        </p:nvSpPr>
-        <p:spPr/>
-        <p:txBody>
-          <a:bodyPr/>
-          <a:lstStyle/>
-          <a:p>
-            <a:r>
-              <a:rPr lang="en-US" dirty="0"/>
               <a:t>Close on the idea: the real bottleneck in enterprise AI isn't writing code, it's the thinking before it. Compile automates that. Thank you to our mentor, Prof. Rikita Chokshi, for her guidance. We're happy to take questions or go deeper into the live demo.</a:t>
             </a:r>
           </a:p>
@@ -641,7 +554,7 @@
           <a:p>
             <a:r>
               <a:rPr lang="en-US" dirty="0"/>
-              <a:t>This is the user journey. Stage 1: intake, from a sentence, a file or a template. Stage 2: the discovery chat, where Compile asks what a real business analyst would ask before writing anything. Stage 3: parallel synthesis compiles all deliverables together so they stay consistent. Stage 4: the blueprint hub, with one-click export. Note the three principles: it consults rather than summarizes, everything shares one source of truth, and the output is concrete enough to hand to engineers.</a:t>
+              <a:t>Switch to the live demo here. Walk through: sign-in, the dashboard, and Transformation Intake for ShopPilot, a SaaS app for small retail shops. We paste the business context and attach a supporting document, then launch AI discovery. Compile comes back with five clarifying questions -- stakeholders, compliance, integrations, budget, expected load -- answered in chat until discovery readiness hits 100%. Compile then runs parallel multi-agent synthesis (sped up to about 18 seconds in the edit) and lands on the Architecture Hub. Walk the tabs: Executive BRD, Solution Architecture (note the structured fallback if the AI provider is unavailable, and Regenerate Section), Process Intelligence BPMN, Database and REST APIs, and Effort and Cost. Finish on Version History, saved as an immutable v1.0 snapshot. Keep a screen recording ready as a backup.</a:t>
             </a:r>
           </a:p>
         </p:txBody>
@@ -663,7 +576,7 @@
           <a:p>
             <a:fld id="{F7021451-1387-4CA6-816F-3879F97B5CBC}" type="slidenum">
               <a:rPr lang="en-US"/>
-              <a:t>3</a:t>
+              <a:t>4</a:t>
             </a:fld>
             <a:endParaRPr lang="en-US"/>
           </a:p>
@@ -728,7 +641,7 @@
           <a:p>
             <a:r>
               <a:rPr lang="en-US" dirty="0"/>
-              <a:t>Switch to the live demo here. Walk through: sign-in, the dashboard, and Transformation Intake for ShopPilot, a SaaS app for small retail shops. We paste the business context and attach a supporting document, then launch AI discovery. Compile comes back with five clarifying questions -- stakeholders, compliance, integrations, budget, expected load -- answered in chat until discovery readiness hits 100%. Compile then runs parallel multi-agent synthesis (sped up to about 18 seconds in the edit) and lands on the Architecture Hub. Walk the tabs: Executive BRD, Solution Architecture (note the structured fallback if the AI provider is unavailable, and Regenerate Section), Process Intelligence BPMN, Database and REST APIs, and Effort and Cost. Finish on Version History, saved as an immutable v1.0 snapshot. Keep a screen recording ready as a backup.</a:t>
+              <a:t>These are the six pillars generated for every project. Because they are compiled together, the BRD, the architecture, the schema and the cost bands stay consistent with each other. Developers can start scaffolding from the schema and API contracts immediately.</a:t>
             </a:r>
           </a:p>
         </p:txBody>
@@ -750,7 +663,7 @@
           <a:p>
             <a:fld id="{F7021451-1387-4CA6-816F-3879F97B5CBC}" type="slidenum">
               <a:rPr lang="en-US"/>
-              <a:t>4</a:t>
+              <a:t>5</a:t>
             </a:fld>
             <a:endParaRPr lang="en-US"/>
           </a:p>
@@ -815,7 +728,7 @@
           <a:p>
             <a:r>
               <a:rPr lang="en-US" dirty="0"/>
-              <a:t>These are the six pillars generated for every project. Because they are compiled together, the BRD, the architecture, the schema and the cost bands stay consistent with each other. Developers can start scaffolding from the schema and API contracts immediately.</a:t>
+              <a:t>Some real tabs from the hub. The stack matrix explains why each technology was chosen. The BPMN view shows workflow steps with actors, SLAs and escalation rules. The API tab gives developers the schema and endpoint contracts. The cost tab gives three budget tiers with a phased delivery schedule. All of it is derived from the same discovery answers, so the tabs agree with each other.</a:t>
             </a:r>
           </a:p>
         </p:txBody>
@@ -837,7 +750,7 @@
           <a:p>
             <a:fld id="{F7021451-1387-4CA6-816F-3879F97B5CBC}" type="slidenum">
               <a:rPr lang="en-US"/>
-              <a:t>5</a:t>
+              <a:t>6</a:t>
             </a:fld>
             <a:endParaRPr lang="en-US"/>
           </a:p>
@@ -902,7 +815,7 @@
           <a:p>
             <a:r>
               <a:rPr lang="en-US" dirty="0"/>
-              <a:t>Some real tabs from the hub. The stack matrix explains why each technology was chosen. The BPMN view shows workflow steps with actors, SLAs and escalation rules. The API tab gives developers the schema and endpoint contracts. The cost tab gives three budget tiers with a phased delivery schedule. All of it is derived from the same discovery answers, so the tabs agree with each other.</a:t>
+              <a:t>Technically, Compile is three tiers. The React client talks to a Node and Express gateway that handles authentication and persistence in MySQL. The gateway offloads intelligence to a dedicated Python FastAPI service, so AI latency never blocks normal API traffic. That service pairs a custom scikit-learn classifier with Gemini for generation.</a:t>
             </a:r>
           </a:p>
         </p:txBody>
@@ -924,7 +837,7 @@
           <a:p>
             <a:fld id="{F7021451-1387-4CA6-816F-3879F97B5CBC}" type="slidenum">
               <a:rPr lang="en-US"/>
-              <a:t>6</a:t>
+              <a:t>7</a:t>
             </a:fld>
             <a:endParaRPr lang="en-US"/>
           </a:p>
@@ -989,7 +902,7 @@
           <a:p>
             <a:r>
               <a:rPr lang="en-US" dirty="0"/>
-              <a:t>Technically, Compile is three tiers. The React client talks to a Node and Express gateway that handles authentication and persistence in MySQL. The gateway offloads intelligence to a dedicated Python FastAPI service, so AI latency never blocks normal API traffic. That service pairs a custom scikit-learn classifier with Gemini for generation.</a:t>
+              <a:t>Two things set Compile apart from a basic LLM wrapper. First, architecture is iterative, so we treat it like source code: every generation is a versioned snapshot, you can regenerate a single section, diff two versions and roll back. Second, resilience: generative APIs hit load spikes, so we run a classifier first, retry with exponential backoff, fail over across models, and finally fall back to an offline dataset. Check that this matches what is actually implemented before presenting.</a:t>
             </a:r>
           </a:p>
         </p:txBody>
@@ -1011,7 +924,7 @@
           <a:p>
             <a:fld id="{F7021451-1387-4CA6-816F-3879F97B5CBC}" type="slidenum">
               <a:rPr lang="en-US"/>
-              <a:t>7</a:t>
+              <a:t>8</a:t>
             </a:fld>
             <a:endParaRPr lang="en-US"/>
           </a:p>
@@ -1076,7 +989,7 @@
           <a:p>
             <a:r>
               <a:rPr lang="en-US" dirty="0"/>
-              <a:t>Two things set Compile apart from a basic LLM wrapper. First, architecture is iterative, so we treat it like source code: every generation is a versioned snapshot, you can regenerate a single section, diff two versions and roll back. Second, resilience: generative APIs hit load spikes, so we run a classifier first, retry with exponential backoff, fail over across models, and finally fall back to an offline dataset. Check that this matches what is actually implemented before presenting.</a:t>
+              <a:t>Monetization has three layers: subscriptions tiered by organization size, usage-based pricing per blueprint or discovery session, and white-label enterprise licences for consulting firms like Futurrizon. The value is speed and alignment: weeks to minutes, six deliverables from one conversation, and one shared source of truth. Replace 'Weeks to Minutes' with a measured number from your own demo runs if you have one.</a:t>
             </a:r>
           </a:p>
         </p:txBody>
@@ -1098,7 +1011,7 @@
           <a:p>
             <a:fld id="{F7021451-1387-4CA6-816F-3879F97B5CBC}" type="slidenum">
               <a:rPr lang="en-US"/>
-              <a:t>8</a:t>
+              <a:t>9</a:t>
             </a:fld>
             <a:endParaRPr lang="en-US"/>
           </a:p>
@@ -1163,7 +1076,7 @@
           <a:p>
             <a:r>
               <a:rPr lang="en-US" dirty="0"/>
-              <a:t>Monetization has three layers: subscriptions tiered by organization size, usage-based pricing per blueprint or discovery session, and white-label enterprise licences for consulting firms like Futurrizon. The value is speed and alignment: weeks to minutes, six deliverables from one conversation, and one shared source of truth. Replace 'Weeks to Minutes' with a measured number from your own demo runs if you have one.</a:t>
+              <a:t>Today Compile turns requirements into a blueprint. Next, we close the loop into delivery: generate Terraform and Kubernetes manifests from the cloud topology, and push requirements into Jira and GitHub as epics and stories. Longer term, one-click provisioning to the major clouds. Adjust the 'Shipped' list to match exactly what is live.</a:t>
             </a:r>
           </a:p>
         </p:txBody>
@@ -1185,7 +1098,7 @@
           <a:p>
             <a:fld id="{F7021451-1387-4CA6-816F-3879F97B5CBC}" type="slidenum">
               <a:rPr lang="en-US"/>
-              <a:t>9</a:t>
+              <a:t>10</a:t>
             </a:fld>
             <a:endParaRPr lang="en-US"/>
           </a:p>
@@ -4606,15 +4519,7 @@
 
 <file path=ppt/slides/slide3.xml><?xml version="1.0" encoding="utf-8"?>
 <p:sld xmlns:a="http://schemas.openxmlformats.org/drawingml/2006/main" xmlns:r="http://schemas.openxmlformats.org/officeDocument/2006/relationships" xmlns:p="http://schemas.openxmlformats.org/presentationml/2006/main">
-  <p:cSld name="Slide 3">
-    <p:bg>
-      <p:bgPr>
-        <a:solidFill>
-          <a:srgbClr val="FFFFFF"/>
-        </a:solidFill>
-        <a:effectLst/>
-      </p:bgPr>
-    </p:bg>
+  <p:cSld>
     <p:spTree>
       <p:nvGrpSpPr>
         <p:cNvPr id="1" name=""/>
@@ -4631,14 +4536,20 @@
       </p:grpSpPr>
       <p:sp>
         <p:nvSpPr>
-          <p:cNvPr id="2" name="Text 0"/>
-          <p:cNvSpPr txBox="1"/>
-          <p:nvPr/>
-        </p:nvSpPr>
-        <p:spPr>
-          <a:xfrm>
-            <a:off x="548640" y="411480"/>
-            <a:ext cx="11064240" cy="731520"/>
+          <p:cNvPr id="3" name="Text 0">
+            <a:extLst>
+              <a:ext uri="{FF2B5EF4-FFF2-40B4-BE49-F238E27FC236}">
+                <a16:creationId xmlns:a16="http://schemas.microsoft.com/office/drawing/2014/main" id="{E0335E51-8D81-ADC0-7E38-CB657D2176CD}"/>
+              </a:ext>
+            </a:extLst>
+          </p:cNvPr>
+          <p:cNvSpPr txBox="1"/>
+          <p:nvPr/>
+        </p:nvSpPr>
+        <p:spPr>
+          <a:xfrm>
+            <a:off x="664769" y="292608"/>
+            <a:ext cx="8229600" cy="548640"/>
           </a:xfrm>
           <a:prstGeom prst="rect">
             <a:avLst/>
@@ -4654,7 +4565,7 @@
               <a:buNone/>
             </a:pPr>
             <a:r>
-              <a:rPr lang="en-US" sz="3800" b="1" dirty="0">
+              <a:rPr lang="en-US" sz="3200" b="1" dirty="0">
                 <a:solidFill>
                   <a:srgbClr val="0A1F3D"/>
                 </a:solidFill>
@@ -4664,20 +4575,201 @@
               </a:rPr>
               <a:t>Compile: Idea in, Blueprint out</a:t>
             </a:r>
-            <a:endParaRPr lang="en-US" sz="3800" dirty="0"/>
-          </a:p>
-        </p:txBody>
-      </p:sp>
-      <p:sp>
-        <p:nvSpPr>
-          <p:cNvPr id="3" name="Text 1"/>
-          <p:cNvSpPr txBox="1"/>
-          <p:nvPr/>
-        </p:nvSpPr>
-        <p:spPr>
-          <a:xfrm>
-            <a:off x="548640" y="1143000"/>
-            <a:ext cx="11064240" cy="457200"/>
+            <a:endParaRPr lang="en-US" sz="3200" dirty="0"/>
+          </a:p>
+        </p:txBody>
+      </p:sp>
+      <p:sp>
+        <p:nvSpPr>
+          <p:cNvPr id="5" name="Text 1">
+            <a:extLst>
+              <a:ext uri="{FF2B5EF4-FFF2-40B4-BE49-F238E27FC236}">
+                <a16:creationId xmlns:a16="http://schemas.microsoft.com/office/drawing/2014/main" id="{2C78D162-99F3-843A-281C-13D1A1DCC773}"/>
+              </a:ext>
+            </a:extLst>
+          </p:cNvPr>
+          <p:cNvSpPr txBox="1"/>
+          <p:nvPr/>
+        </p:nvSpPr>
+        <p:spPr>
+          <a:xfrm>
+            <a:off x="609905" y="914400"/>
+            <a:ext cx="8229600" cy="320040"/>
+          </a:xfrm>
+          <a:prstGeom prst="rect">
+            <a:avLst/>
+          </a:prstGeom>
+          <a:noFill/>
+          <a:ln/>
+        </p:spPr>
+        <p:txBody>
+          <a:bodyPr wrap="square" lIns="0" tIns="0" rIns="0" bIns="0" rtlCol="0" anchor="ctr"/>
+          <a:lstStyle/>
+          <a:p>
+            <a:pPr marL="0" indent="0">
+              <a:buNone/>
+            </a:pPr>
+            <a:r>
+              <a:rPr lang="en-US" sz="1400" dirty="0">
+                <a:solidFill>
+                  <a:srgbClr val="5B6B82"/>
+                </a:solidFill>
+                <a:latin typeface="Calibri" pitchFamily="34" charset="0"/>
+                <a:ea typeface="Calibri" pitchFamily="34" charset="-122"/>
+                <a:cs typeface="Calibri" pitchFamily="34" charset="-120"/>
+              </a:rPr>
+              <a:t>From a messy idea to a build-ready blueprint, in four steps.</a:t>
+            </a:r>
+            <a:endParaRPr lang="en-US" sz="1400" dirty="0"/>
+          </a:p>
+        </p:txBody>
+      </p:sp>
+      <p:sp>
+        <p:nvSpPr>
+          <p:cNvPr id="7" name="Shape 2">
+            <a:extLst>
+              <a:ext uri="{FF2B5EF4-FFF2-40B4-BE49-F238E27FC236}">
+                <a16:creationId xmlns:a16="http://schemas.microsoft.com/office/drawing/2014/main" id="{4B7A9D9E-C517-DCD4-D408-59DD4DA36A63}"/>
+              </a:ext>
+            </a:extLst>
+          </p:cNvPr>
+          <p:cNvSpPr/>
+          <p:nvPr/>
+        </p:nvSpPr>
+        <p:spPr>
+          <a:xfrm>
+            <a:off x="609905" y="1508760"/>
+            <a:ext cx="1828800" cy="1325880"/>
+          </a:xfrm>
+          <a:prstGeom prst="roundRect">
+            <a:avLst>
+              <a:gd name="adj" fmla="val 5517"/>
+            </a:avLst>
+          </a:prstGeom>
+          <a:solidFill>
+            <a:srgbClr val="FFFFFF"/>
+          </a:solidFill>
+          <a:ln w="15875">
+            <a:solidFill>
+              <a:srgbClr val="0A1F3D"/>
+            </a:solidFill>
+            <a:prstDash val="solid"/>
+          </a:ln>
+          <a:effectLst>
+            <a:outerShdw blurRad="76200" dist="25400" dir="5400000" algn="bl" rotWithShape="0">
+              <a:srgbClr val="000000">
+                <a:alpha val="15000"/>
+              </a:srgbClr>
+            </a:outerShdw>
+          </a:effectLst>
+        </p:spPr>
+      </p:sp>
+      <p:sp>
+        <p:nvSpPr>
+          <p:cNvPr id="9" name="Text 3">
+            <a:extLst>
+              <a:ext uri="{FF2B5EF4-FFF2-40B4-BE49-F238E27FC236}">
+                <a16:creationId xmlns:a16="http://schemas.microsoft.com/office/drawing/2014/main" id="{961E2A48-6AA4-4113-9561-5604FEA3B73A}"/>
+              </a:ext>
+            </a:extLst>
+          </p:cNvPr>
+          <p:cNvSpPr txBox="1"/>
+          <p:nvPr/>
+        </p:nvSpPr>
+        <p:spPr>
+          <a:xfrm>
+            <a:off x="747065" y="1618488"/>
+            <a:ext cx="1554480" cy="201168"/>
+          </a:xfrm>
+          <a:prstGeom prst="rect">
+            <a:avLst/>
+          </a:prstGeom>
+          <a:noFill/>
+          <a:ln/>
+        </p:spPr>
+        <p:txBody>
+          <a:bodyPr wrap="square" lIns="0" tIns="0" rIns="0" bIns="0" rtlCol="0" anchor="ctr"/>
+          <a:lstStyle/>
+          <a:p>
+            <a:pPr marL="0" indent="0">
+              <a:buNone/>
+            </a:pPr>
+            <a:r>
+              <a:rPr lang="en-US" sz="1000" b="1" kern="0" spc="200" dirty="0">
+                <a:solidFill>
+                  <a:srgbClr val="5B6B82"/>
+                </a:solidFill>
+                <a:latin typeface="Calibri" pitchFamily="34" charset="0"/>
+                <a:ea typeface="Calibri" pitchFamily="34" charset="-122"/>
+                <a:cs typeface="Calibri" pitchFamily="34" charset="-120"/>
+              </a:rPr>
+              <a:t>INPUT</a:t>
+            </a:r>
+            <a:endParaRPr lang="en-US" sz="1000" dirty="0"/>
+          </a:p>
+        </p:txBody>
+      </p:sp>
+      <p:sp>
+        <p:nvSpPr>
+          <p:cNvPr id="11" name="Text 4">
+            <a:extLst>
+              <a:ext uri="{FF2B5EF4-FFF2-40B4-BE49-F238E27FC236}">
+                <a16:creationId xmlns:a16="http://schemas.microsoft.com/office/drawing/2014/main" id="{A2ED3D5F-F274-B329-F4F8-2D1E05A68DA3}"/>
+              </a:ext>
+            </a:extLst>
+          </p:cNvPr>
+          <p:cNvSpPr txBox="1"/>
+          <p:nvPr/>
+        </p:nvSpPr>
+        <p:spPr>
+          <a:xfrm>
+            <a:off x="747065" y="1837944"/>
+            <a:ext cx="1554480" cy="292608"/>
+          </a:xfrm>
+          <a:prstGeom prst="rect">
+            <a:avLst/>
+          </a:prstGeom>
+          <a:noFill/>
+          <a:ln/>
+        </p:spPr>
+        <p:txBody>
+          <a:bodyPr wrap="square" lIns="0" tIns="0" rIns="0" bIns="0" rtlCol="0" anchor="ctr"/>
+          <a:lstStyle/>
+          <a:p>
+            <a:pPr marL="0" indent="0">
+              <a:buNone/>
+            </a:pPr>
+            <a:r>
+              <a:rPr lang="en-US" sz="1500" b="1" dirty="0">
+                <a:solidFill>
+                  <a:srgbClr val="0A1F3D"/>
+                </a:solidFill>
+                <a:latin typeface="Cambria" pitchFamily="34" charset="0"/>
+                <a:ea typeface="Cambria" pitchFamily="34" charset="-122"/>
+                <a:cs typeface="Cambria" pitchFamily="34" charset="-120"/>
+              </a:rPr>
+              <a:t>Business idea</a:t>
+            </a:r>
+            <a:endParaRPr lang="en-US" sz="1500" dirty="0"/>
+          </a:p>
+        </p:txBody>
+      </p:sp>
+      <p:sp>
+        <p:nvSpPr>
+          <p:cNvPr id="13" name="Text 5">
+            <a:extLst>
+              <a:ext uri="{FF2B5EF4-FFF2-40B4-BE49-F238E27FC236}">
+                <a16:creationId xmlns:a16="http://schemas.microsoft.com/office/drawing/2014/main" id="{AAF38F6E-26F3-B6FA-0762-BA79131E10C4}"/>
+              </a:ext>
+            </a:extLst>
+          </p:cNvPr>
+          <p:cNvSpPr txBox="1"/>
+          <p:nvPr/>
+        </p:nvSpPr>
+        <p:spPr>
+          <a:xfrm>
+            <a:off x="747065" y="2148840"/>
+            <a:ext cx="1554480" cy="621792"/>
           </a:xfrm>
           <a:prstGeom prst="rect">
             <a:avLst/>
@@ -4693,7 +4785,7 @@
               <a:buNone/>
             </a:pPr>
             <a:r>
-              <a:rPr lang="en-US" sz="1800" dirty="0">
+              <a:rPr lang="en-US" sz="1050" dirty="0">
                 <a:solidFill>
                   <a:srgbClr val="5B6B82"/>
                 </a:solidFill>
@@ -4701,25 +4793,1083 @@
                 <a:ea typeface="Calibri" pitchFamily="34" charset="-122"/>
                 <a:cs typeface="Calibri" pitchFamily="34" charset="-120"/>
               </a:rPr>
-              <a:t>One conversation replaces weeks of discovery.</a:t>
-            </a:r>
-            <a:endParaRPr lang="en-US" sz="1800" dirty="0"/>
-          </a:p>
-        </p:txBody>
-      </p:sp>
-      <p:sp>
-        <p:nvSpPr>
-          <p:cNvPr id="4" name="Shape 2"/>
+              <a:t>One line, a PDF, or an industry template</a:t>
+            </a:r>
+            <a:endParaRPr lang="en-US" sz="1050" dirty="0"/>
+          </a:p>
+        </p:txBody>
+      </p:sp>
+      <p:sp>
+        <p:nvSpPr>
+          <p:cNvPr id="15" name="Shape 6">
+            <a:extLst>
+              <a:ext uri="{FF2B5EF4-FFF2-40B4-BE49-F238E27FC236}">
+                <a16:creationId xmlns:a16="http://schemas.microsoft.com/office/drawing/2014/main" id="{E1C2EC05-77A7-39B8-46EA-9F318C6FB4AA}"/>
+              </a:ext>
+            </a:extLst>
+          </p:cNvPr>
           <p:cNvSpPr/>
           <p:nvPr/>
         </p:nvSpPr>
         <p:spPr>
           <a:xfrm>
-            <a:off x="548640" y="1920240"/>
-            <a:ext cx="2514600" cy="3017520"/>
-          </a:xfrm>
-          <a:prstGeom prst="rect">
-            <a:avLst/>
+            <a:off x="2493569" y="2171700"/>
+            <a:ext cx="347472" cy="0"/>
+          </a:xfrm>
+          <a:prstGeom prst="line">
+            <a:avLst/>
+          </a:prstGeom>
+          <a:noFill/>
+          <a:ln w="28575">
+            <a:solidFill>
+              <a:srgbClr val="E0A243"/>
+            </a:solidFill>
+            <a:prstDash val="solid"/>
+            <a:tailEnd type="triangle"/>
+          </a:ln>
+        </p:spPr>
+      </p:sp>
+      <p:sp>
+        <p:nvSpPr>
+          <p:cNvPr id="17" name="Shape 7">
+            <a:extLst>
+              <a:ext uri="{FF2B5EF4-FFF2-40B4-BE49-F238E27FC236}">
+                <a16:creationId xmlns:a16="http://schemas.microsoft.com/office/drawing/2014/main" id="{E628B934-60EE-016B-D25D-46B541358E34}"/>
+              </a:ext>
+            </a:extLst>
+          </p:cNvPr>
+          <p:cNvSpPr/>
+          <p:nvPr/>
+        </p:nvSpPr>
+        <p:spPr>
+          <a:xfrm>
+            <a:off x="2895905" y="1508760"/>
+            <a:ext cx="1828800" cy="1325880"/>
+          </a:xfrm>
+          <a:prstGeom prst="roundRect">
+            <a:avLst>
+              <a:gd name="adj" fmla="val 5517"/>
+            </a:avLst>
+          </a:prstGeom>
+          <a:solidFill>
+            <a:srgbClr val="0A1F3D"/>
+          </a:solidFill>
+          <a:ln w="15875">
+            <a:solidFill>
+              <a:srgbClr val="0A1F3D"/>
+            </a:solidFill>
+            <a:prstDash val="solid"/>
+          </a:ln>
+          <a:effectLst>
+            <a:outerShdw blurRad="76200" dist="25400" dir="5400000" algn="bl" rotWithShape="0">
+              <a:srgbClr val="000000">
+                <a:alpha val="15000"/>
+              </a:srgbClr>
+            </a:outerShdw>
+          </a:effectLst>
+        </p:spPr>
+      </p:sp>
+      <p:sp>
+        <p:nvSpPr>
+          <p:cNvPr id="19" name="Text 8">
+            <a:extLst>
+              <a:ext uri="{FF2B5EF4-FFF2-40B4-BE49-F238E27FC236}">
+                <a16:creationId xmlns:a16="http://schemas.microsoft.com/office/drawing/2014/main" id="{DB71430C-8622-7F29-EAF5-D7CF0FBB8A6B}"/>
+              </a:ext>
+            </a:extLst>
+          </p:cNvPr>
+          <p:cNvSpPr txBox="1"/>
+          <p:nvPr/>
+        </p:nvSpPr>
+        <p:spPr>
+          <a:xfrm>
+            <a:off x="3033065" y="1618488"/>
+            <a:ext cx="1554480" cy="201168"/>
+          </a:xfrm>
+          <a:prstGeom prst="rect">
+            <a:avLst/>
+          </a:prstGeom>
+          <a:noFill/>
+          <a:ln/>
+        </p:spPr>
+        <p:txBody>
+          <a:bodyPr wrap="square" lIns="0" tIns="0" rIns="0" bIns="0" rtlCol="0" anchor="ctr"/>
+          <a:lstStyle/>
+          <a:p>
+            <a:pPr marL="0" indent="0">
+              <a:buNone/>
+            </a:pPr>
+            <a:r>
+              <a:rPr lang="en-US" sz="1000" b="1" kern="0" spc="200" dirty="0">
+                <a:solidFill>
+                  <a:srgbClr val="E0A243"/>
+                </a:solidFill>
+                <a:latin typeface="Calibri" pitchFamily="34" charset="0"/>
+                <a:ea typeface="Calibri" pitchFamily="34" charset="-122"/>
+                <a:cs typeface="Calibri" pitchFamily="34" charset="-120"/>
+              </a:rPr>
+              <a:t>01</a:t>
+            </a:r>
+            <a:endParaRPr lang="en-US" sz="1000" dirty="0"/>
+          </a:p>
+        </p:txBody>
+      </p:sp>
+      <p:sp>
+        <p:nvSpPr>
+          <p:cNvPr id="21" name="Text 9">
+            <a:extLst>
+              <a:ext uri="{FF2B5EF4-FFF2-40B4-BE49-F238E27FC236}">
+                <a16:creationId xmlns:a16="http://schemas.microsoft.com/office/drawing/2014/main" id="{EF43AB94-2600-55DE-6F4F-D6EA7343959A}"/>
+              </a:ext>
+            </a:extLst>
+          </p:cNvPr>
+          <p:cNvSpPr txBox="1"/>
+          <p:nvPr/>
+        </p:nvSpPr>
+        <p:spPr>
+          <a:xfrm>
+            <a:off x="3033065" y="1837944"/>
+            <a:ext cx="1554480" cy="292608"/>
+          </a:xfrm>
+          <a:prstGeom prst="rect">
+            <a:avLst/>
+          </a:prstGeom>
+          <a:noFill/>
+          <a:ln/>
+        </p:spPr>
+        <p:txBody>
+          <a:bodyPr wrap="square" lIns="0" tIns="0" rIns="0" bIns="0" rtlCol="0" anchor="ctr"/>
+          <a:lstStyle/>
+          <a:p>
+            <a:pPr marL="0" indent="0">
+              <a:buNone/>
+            </a:pPr>
+            <a:r>
+              <a:rPr lang="en-US" sz="1500" b="1" dirty="0">
+                <a:solidFill>
+                  <a:srgbClr val="FFFFFF"/>
+                </a:solidFill>
+                <a:latin typeface="Cambria" pitchFamily="34" charset="0"/>
+                <a:ea typeface="Cambria" pitchFamily="34" charset="-122"/>
+                <a:cs typeface="Cambria" pitchFamily="34" charset="-120"/>
+              </a:rPr>
+              <a:t>Intake</a:t>
+            </a:r>
+            <a:endParaRPr lang="en-US" sz="1500" dirty="0"/>
+          </a:p>
+        </p:txBody>
+      </p:sp>
+      <p:sp>
+        <p:nvSpPr>
+          <p:cNvPr id="23" name="Text 10">
+            <a:extLst>
+              <a:ext uri="{FF2B5EF4-FFF2-40B4-BE49-F238E27FC236}">
+                <a16:creationId xmlns:a16="http://schemas.microsoft.com/office/drawing/2014/main" id="{BBDB2CC0-F245-D4CF-F6ED-41D60C561209}"/>
+              </a:ext>
+            </a:extLst>
+          </p:cNvPr>
+          <p:cNvSpPr txBox="1"/>
+          <p:nvPr/>
+        </p:nvSpPr>
+        <p:spPr>
+          <a:xfrm>
+            <a:off x="3033065" y="2148840"/>
+            <a:ext cx="1554480" cy="621792"/>
+          </a:xfrm>
+          <a:prstGeom prst="rect">
+            <a:avLst/>
+          </a:prstGeom>
+          <a:noFill/>
+          <a:ln/>
+        </p:spPr>
+        <p:txBody>
+          <a:bodyPr wrap="square" lIns="0" tIns="0" rIns="0" bIns="0" rtlCol="0" anchor="t"/>
+          <a:lstStyle/>
+          <a:p>
+            <a:pPr marL="0" indent="0">
+              <a:buNone/>
+            </a:pPr>
+            <a:r>
+              <a:rPr lang="en-US" sz="1050" dirty="0">
+                <a:solidFill>
+                  <a:srgbClr val="B9C7DD"/>
+                </a:solidFill>
+                <a:latin typeface="Calibri" pitchFamily="34" charset="0"/>
+                <a:ea typeface="Calibri" pitchFamily="34" charset="-122"/>
+                <a:cs typeface="Calibri" pitchFamily="34" charset="-120"/>
+              </a:rPr>
+              <a:t>Domain and scale classified; input validated with a confidence score</a:t>
+            </a:r>
+            <a:endParaRPr lang="en-US" sz="1050" dirty="0"/>
+          </a:p>
+        </p:txBody>
+      </p:sp>
+      <p:sp>
+        <p:nvSpPr>
+          <p:cNvPr id="25" name="Shape 11">
+            <a:extLst>
+              <a:ext uri="{FF2B5EF4-FFF2-40B4-BE49-F238E27FC236}">
+                <a16:creationId xmlns:a16="http://schemas.microsoft.com/office/drawing/2014/main" id="{7E9BA4C5-239D-C0F2-F03E-078347CEB2DC}"/>
+              </a:ext>
+            </a:extLst>
+          </p:cNvPr>
+          <p:cNvSpPr/>
+          <p:nvPr/>
+        </p:nvSpPr>
+        <p:spPr>
+          <a:xfrm>
+            <a:off x="4779569" y="2171700"/>
+            <a:ext cx="347472" cy="0"/>
+          </a:xfrm>
+          <a:prstGeom prst="line">
+            <a:avLst/>
+          </a:prstGeom>
+          <a:noFill/>
+          <a:ln w="28575">
+            <a:solidFill>
+              <a:srgbClr val="E0A243"/>
+            </a:solidFill>
+            <a:prstDash val="solid"/>
+            <a:tailEnd type="triangle"/>
+          </a:ln>
+        </p:spPr>
+      </p:sp>
+      <p:sp>
+        <p:nvSpPr>
+          <p:cNvPr id="27" name="Shape 12">
+            <a:extLst>
+              <a:ext uri="{FF2B5EF4-FFF2-40B4-BE49-F238E27FC236}">
+                <a16:creationId xmlns:a16="http://schemas.microsoft.com/office/drawing/2014/main" id="{0067C557-A85E-10B7-2233-05912AFAB954}"/>
+              </a:ext>
+            </a:extLst>
+          </p:cNvPr>
+          <p:cNvSpPr/>
+          <p:nvPr/>
+        </p:nvSpPr>
+        <p:spPr>
+          <a:xfrm>
+            <a:off x="5181905" y="1508760"/>
+            <a:ext cx="1828800" cy="1325880"/>
+          </a:xfrm>
+          <a:prstGeom prst="roundRect">
+            <a:avLst>
+              <a:gd name="adj" fmla="val 5517"/>
+            </a:avLst>
+          </a:prstGeom>
+          <a:solidFill>
+            <a:srgbClr val="0A1F3D"/>
+          </a:solidFill>
+          <a:ln w="15875">
+            <a:solidFill>
+              <a:srgbClr val="0A1F3D"/>
+            </a:solidFill>
+            <a:prstDash val="solid"/>
+          </a:ln>
+          <a:effectLst>
+            <a:outerShdw blurRad="76200" dist="25400" dir="5400000" algn="bl" rotWithShape="0">
+              <a:srgbClr val="000000">
+                <a:alpha val="15000"/>
+              </a:srgbClr>
+            </a:outerShdw>
+          </a:effectLst>
+        </p:spPr>
+      </p:sp>
+      <p:sp>
+        <p:nvSpPr>
+          <p:cNvPr id="29" name="Text 13">
+            <a:extLst>
+              <a:ext uri="{FF2B5EF4-FFF2-40B4-BE49-F238E27FC236}">
+                <a16:creationId xmlns:a16="http://schemas.microsoft.com/office/drawing/2014/main" id="{4EAC0096-A750-C633-2805-17AC8C17C82D}"/>
+              </a:ext>
+            </a:extLst>
+          </p:cNvPr>
+          <p:cNvSpPr txBox="1"/>
+          <p:nvPr/>
+        </p:nvSpPr>
+        <p:spPr>
+          <a:xfrm>
+            <a:off x="5319065" y="1618488"/>
+            <a:ext cx="1554480" cy="201168"/>
+          </a:xfrm>
+          <a:prstGeom prst="rect">
+            <a:avLst/>
+          </a:prstGeom>
+          <a:noFill/>
+          <a:ln/>
+        </p:spPr>
+        <p:txBody>
+          <a:bodyPr wrap="square" lIns="0" tIns="0" rIns="0" bIns="0" rtlCol="0" anchor="ctr"/>
+          <a:lstStyle/>
+          <a:p>
+            <a:pPr marL="0" indent="0">
+              <a:buNone/>
+            </a:pPr>
+            <a:r>
+              <a:rPr lang="en-US" sz="1000" b="1" kern="0" spc="200" dirty="0">
+                <a:solidFill>
+                  <a:srgbClr val="E0A243"/>
+                </a:solidFill>
+                <a:latin typeface="Calibri" pitchFamily="34" charset="0"/>
+                <a:ea typeface="Calibri" pitchFamily="34" charset="-122"/>
+                <a:cs typeface="Calibri" pitchFamily="34" charset="-120"/>
+              </a:rPr>
+              <a:t>02</a:t>
+            </a:r>
+            <a:endParaRPr lang="en-US" sz="1000" dirty="0"/>
+          </a:p>
+        </p:txBody>
+      </p:sp>
+      <p:sp>
+        <p:nvSpPr>
+          <p:cNvPr id="31" name="Text 14">
+            <a:extLst>
+              <a:ext uri="{FF2B5EF4-FFF2-40B4-BE49-F238E27FC236}">
+                <a16:creationId xmlns:a16="http://schemas.microsoft.com/office/drawing/2014/main" id="{D23D4677-4DDC-C5CB-EBC0-A9E986826F21}"/>
+              </a:ext>
+            </a:extLst>
+          </p:cNvPr>
+          <p:cNvSpPr txBox="1"/>
+          <p:nvPr/>
+        </p:nvSpPr>
+        <p:spPr>
+          <a:xfrm>
+            <a:off x="5319065" y="1837944"/>
+            <a:ext cx="1554480" cy="292608"/>
+          </a:xfrm>
+          <a:prstGeom prst="rect">
+            <a:avLst/>
+          </a:prstGeom>
+          <a:noFill/>
+          <a:ln/>
+        </p:spPr>
+        <p:txBody>
+          <a:bodyPr wrap="square" lIns="0" tIns="0" rIns="0" bIns="0" rtlCol="0" anchor="ctr"/>
+          <a:lstStyle/>
+          <a:p>
+            <a:pPr marL="0" indent="0">
+              <a:buNone/>
+            </a:pPr>
+            <a:r>
+              <a:rPr lang="en-US" sz="1500" b="1" dirty="0">
+                <a:solidFill>
+                  <a:srgbClr val="FFFFFF"/>
+                </a:solidFill>
+                <a:latin typeface="Cambria" pitchFamily="34" charset="0"/>
+                <a:ea typeface="Cambria" pitchFamily="34" charset="-122"/>
+                <a:cs typeface="Cambria" pitchFamily="34" charset="-120"/>
+              </a:rPr>
+              <a:t>AI Discovery</a:t>
+            </a:r>
+            <a:endParaRPr lang="en-US" sz="1500" dirty="0"/>
+          </a:p>
+        </p:txBody>
+      </p:sp>
+      <p:sp>
+        <p:nvSpPr>
+          <p:cNvPr id="33" name="Text 15">
+            <a:extLst>
+              <a:ext uri="{FF2B5EF4-FFF2-40B4-BE49-F238E27FC236}">
+                <a16:creationId xmlns:a16="http://schemas.microsoft.com/office/drawing/2014/main" id="{0C5120AA-BE11-FCC6-9F46-5A6C63B44B07}"/>
+              </a:ext>
+            </a:extLst>
+          </p:cNvPr>
+          <p:cNvSpPr txBox="1"/>
+          <p:nvPr/>
+        </p:nvSpPr>
+        <p:spPr>
+          <a:xfrm>
+            <a:off x="5319065" y="2148840"/>
+            <a:ext cx="1554480" cy="621792"/>
+          </a:xfrm>
+          <a:prstGeom prst="rect">
+            <a:avLst/>
+          </a:prstGeom>
+          <a:noFill/>
+          <a:ln/>
+        </p:spPr>
+        <p:txBody>
+          <a:bodyPr wrap="square" lIns="0" tIns="0" rIns="0" bIns="0" rtlCol="0" anchor="t"/>
+          <a:lstStyle/>
+          <a:p>
+            <a:pPr marL="0" indent="0">
+              <a:buNone/>
+            </a:pPr>
+            <a:r>
+              <a:rPr lang="en-US" sz="1050" dirty="0">
+                <a:solidFill>
+                  <a:srgbClr val="B9C7DD"/>
+                </a:solidFill>
+                <a:latin typeface="Calibri" pitchFamily="34" charset="0"/>
+                <a:ea typeface="Calibri" pitchFamily="34" charset="-122"/>
+                <a:cs typeface="Calibri" pitchFamily="34" charset="-120"/>
+              </a:rPr>
+              <a:t>Five questions: stakeholders, compliance, integrations, budget, load</a:t>
+            </a:r>
+            <a:endParaRPr lang="en-US" sz="1050" dirty="0"/>
+          </a:p>
+        </p:txBody>
+      </p:sp>
+      <p:sp>
+        <p:nvSpPr>
+          <p:cNvPr id="35" name="Shape 16">
+            <a:extLst>
+              <a:ext uri="{FF2B5EF4-FFF2-40B4-BE49-F238E27FC236}">
+                <a16:creationId xmlns:a16="http://schemas.microsoft.com/office/drawing/2014/main" id="{509DEB08-D8A9-F77B-AC14-06A255819A7F}"/>
+              </a:ext>
+            </a:extLst>
+          </p:cNvPr>
+          <p:cNvSpPr/>
+          <p:nvPr/>
+        </p:nvSpPr>
+        <p:spPr>
+          <a:xfrm>
+            <a:off x="7065569" y="2171700"/>
+            <a:ext cx="347472" cy="0"/>
+          </a:xfrm>
+          <a:prstGeom prst="line">
+            <a:avLst/>
+          </a:prstGeom>
+          <a:noFill/>
+          <a:ln w="28575">
+            <a:solidFill>
+              <a:srgbClr val="E0A243"/>
+            </a:solidFill>
+            <a:prstDash val="solid"/>
+            <a:tailEnd type="triangle"/>
+          </a:ln>
+        </p:spPr>
+      </p:sp>
+      <p:sp>
+        <p:nvSpPr>
+          <p:cNvPr id="37" name="Shape 17">
+            <a:extLst>
+              <a:ext uri="{FF2B5EF4-FFF2-40B4-BE49-F238E27FC236}">
+                <a16:creationId xmlns:a16="http://schemas.microsoft.com/office/drawing/2014/main" id="{2908F555-D5E5-94D1-FD34-0DCF114B059D}"/>
+              </a:ext>
+            </a:extLst>
+          </p:cNvPr>
+          <p:cNvSpPr/>
+          <p:nvPr/>
+        </p:nvSpPr>
+        <p:spPr>
+          <a:xfrm>
+            <a:off x="7467905" y="1508760"/>
+            <a:ext cx="1828800" cy="1325880"/>
+          </a:xfrm>
+          <a:prstGeom prst="roundRect">
+            <a:avLst>
+              <a:gd name="adj" fmla="val 5517"/>
+            </a:avLst>
+          </a:prstGeom>
+          <a:solidFill>
+            <a:srgbClr val="0A1F3D"/>
+          </a:solidFill>
+          <a:ln w="15875">
+            <a:solidFill>
+              <a:srgbClr val="0A1F3D"/>
+            </a:solidFill>
+            <a:prstDash val="solid"/>
+          </a:ln>
+          <a:effectLst>
+            <a:outerShdw blurRad="76200" dist="25400" dir="5400000" algn="bl" rotWithShape="0">
+              <a:srgbClr val="000000">
+                <a:alpha val="15000"/>
+              </a:srgbClr>
+            </a:outerShdw>
+          </a:effectLst>
+        </p:spPr>
+      </p:sp>
+      <p:sp>
+        <p:nvSpPr>
+          <p:cNvPr id="39" name="Text 18">
+            <a:extLst>
+              <a:ext uri="{FF2B5EF4-FFF2-40B4-BE49-F238E27FC236}">
+                <a16:creationId xmlns:a16="http://schemas.microsoft.com/office/drawing/2014/main" id="{4B0AE69F-1E7C-E8D5-8035-50CD6D9D8961}"/>
+              </a:ext>
+            </a:extLst>
+          </p:cNvPr>
+          <p:cNvSpPr txBox="1"/>
+          <p:nvPr/>
+        </p:nvSpPr>
+        <p:spPr>
+          <a:xfrm>
+            <a:off x="7605065" y="1618488"/>
+            <a:ext cx="1554480" cy="201168"/>
+          </a:xfrm>
+          <a:prstGeom prst="rect">
+            <a:avLst/>
+          </a:prstGeom>
+          <a:noFill/>
+          <a:ln/>
+        </p:spPr>
+        <p:txBody>
+          <a:bodyPr wrap="square" lIns="0" tIns="0" rIns="0" bIns="0" rtlCol="0" anchor="ctr"/>
+          <a:lstStyle/>
+          <a:p>
+            <a:pPr marL="0" indent="0">
+              <a:buNone/>
+            </a:pPr>
+            <a:r>
+              <a:rPr lang="en-US" sz="1000" b="1" kern="0" spc="200" dirty="0">
+                <a:solidFill>
+                  <a:srgbClr val="E0A243"/>
+                </a:solidFill>
+                <a:latin typeface="Calibri" pitchFamily="34" charset="0"/>
+                <a:ea typeface="Calibri" pitchFamily="34" charset="-122"/>
+                <a:cs typeface="Calibri" pitchFamily="34" charset="-120"/>
+              </a:rPr>
+              <a:t>03</a:t>
+            </a:r>
+            <a:endParaRPr lang="en-US" sz="1000" dirty="0"/>
+          </a:p>
+        </p:txBody>
+      </p:sp>
+      <p:sp>
+        <p:nvSpPr>
+          <p:cNvPr id="41" name="Text 19">
+            <a:extLst>
+              <a:ext uri="{FF2B5EF4-FFF2-40B4-BE49-F238E27FC236}">
+                <a16:creationId xmlns:a16="http://schemas.microsoft.com/office/drawing/2014/main" id="{D9ADCBBE-E71D-F830-EC5E-F5653B5B21A7}"/>
+              </a:ext>
+            </a:extLst>
+          </p:cNvPr>
+          <p:cNvSpPr txBox="1"/>
+          <p:nvPr/>
+        </p:nvSpPr>
+        <p:spPr>
+          <a:xfrm>
+            <a:off x="7605065" y="1837944"/>
+            <a:ext cx="1554480" cy="292608"/>
+          </a:xfrm>
+          <a:prstGeom prst="rect">
+            <a:avLst/>
+          </a:prstGeom>
+          <a:noFill/>
+          <a:ln/>
+        </p:spPr>
+        <p:txBody>
+          <a:bodyPr wrap="square" lIns="0" tIns="0" rIns="0" bIns="0" rtlCol="0" anchor="ctr"/>
+          <a:lstStyle/>
+          <a:p>
+            <a:pPr marL="0" indent="0">
+              <a:buNone/>
+            </a:pPr>
+            <a:r>
+              <a:rPr lang="en-US" sz="1500" b="1" dirty="0">
+                <a:solidFill>
+                  <a:srgbClr val="FFFFFF"/>
+                </a:solidFill>
+                <a:latin typeface="Cambria" pitchFamily="34" charset="0"/>
+                <a:ea typeface="Cambria" pitchFamily="34" charset="-122"/>
+                <a:cs typeface="Cambria" pitchFamily="34" charset="-120"/>
+              </a:rPr>
+              <a:t>Synthesis</a:t>
+            </a:r>
+            <a:endParaRPr lang="en-US" sz="1500" dirty="0"/>
+          </a:p>
+        </p:txBody>
+      </p:sp>
+      <p:sp>
+        <p:nvSpPr>
+          <p:cNvPr id="43" name="Text 20">
+            <a:extLst>
+              <a:ext uri="{FF2B5EF4-FFF2-40B4-BE49-F238E27FC236}">
+                <a16:creationId xmlns:a16="http://schemas.microsoft.com/office/drawing/2014/main" id="{07DEDDE5-3F4C-3910-EE99-8FE1A455A3EE}"/>
+              </a:ext>
+            </a:extLst>
+          </p:cNvPr>
+          <p:cNvSpPr txBox="1"/>
+          <p:nvPr/>
+        </p:nvSpPr>
+        <p:spPr>
+          <a:xfrm>
+            <a:off x="7605065" y="2148840"/>
+            <a:ext cx="1554480" cy="621792"/>
+          </a:xfrm>
+          <a:prstGeom prst="rect">
+            <a:avLst/>
+          </a:prstGeom>
+          <a:noFill/>
+          <a:ln/>
+        </p:spPr>
+        <p:txBody>
+          <a:bodyPr wrap="square" lIns="0" tIns="0" rIns="0" bIns="0" rtlCol="0" anchor="t"/>
+          <a:lstStyle/>
+          <a:p>
+            <a:pPr marL="0" indent="0">
+              <a:buNone/>
+            </a:pPr>
+            <a:r>
+              <a:rPr lang="en-US" sz="1050" dirty="0">
+                <a:solidFill>
+                  <a:srgbClr val="B9C7DD"/>
+                </a:solidFill>
+                <a:latin typeface="Calibri" pitchFamily="34" charset="0"/>
+                <a:ea typeface="Calibri" pitchFamily="34" charset="-122"/>
+                <a:cs typeface="Calibri" pitchFamily="34" charset="-120"/>
+              </a:rPr>
+              <a:t>Parallel agents compile every deliverable at once</a:t>
+            </a:r>
+            <a:endParaRPr lang="en-US" sz="1050" dirty="0"/>
+          </a:p>
+        </p:txBody>
+      </p:sp>
+      <p:sp>
+        <p:nvSpPr>
+          <p:cNvPr id="45" name="Shape 21">
+            <a:extLst>
+              <a:ext uri="{FF2B5EF4-FFF2-40B4-BE49-F238E27FC236}">
+                <a16:creationId xmlns:a16="http://schemas.microsoft.com/office/drawing/2014/main" id="{62BAA534-1E7E-6876-5BDC-69F961A02A29}"/>
+              </a:ext>
+            </a:extLst>
+          </p:cNvPr>
+          <p:cNvSpPr/>
+          <p:nvPr/>
+        </p:nvSpPr>
+        <p:spPr>
+          <a:xfrm>
+            <a:off x="9351569" y="2171700"/>
+            <a:ext cx="347472" cy="0"/>
+          </a:xfrm>
+          <a:prstGeom prst="line">
+            <a:avLst/>
+          </a:prstGeom>
+          <a:noFill/>
+          <a:ln w="28575">
+            <a:solidFill>
+              <a:srgbClr val="E0A243"/>
+            </a:solidFill>
+            <a:prstDash val="solid"/>
+            <a:tailEnd type="triangle"/>
+          </a:ln>
+        </p:spPr>
+      </p:sp>
+      <p:sp>
+        <p:nvSpPr>
+          <p:cNvPr id="47" name="Shape 22">
+            <a:extLst>
+              <a:ext uri="{FF2B5EF4-FFF2-40B4-BE49-F238E27FC236}">
+                <a16:creationId xmlns:a16="http://schemas.microsoft.com/office/drawing/2014/main" id="{B4D7DAF7-8F7C-5D5B-4A52-00F16DACD5F1}"/>
+              </a:ext>
+            </a:extLst>
+          </p:cNvPr>
+          <p:cNvSpPr/>
+          <p:nvPr/>
+        </p:nvSpPr>
+        <p:spPr>
+          <a:xfrm>
+            <a:off x="9753905" y="1508760"/>
+            <a:ext cx="1828800" cy="1325880"/>
+          </a:xfrm>
+          <a:prstGeom prst="roundRect">
+            <a:avLst>
+              <a:gd name="adj" fmla="val 5517"/>
+            </a:avLst>
+          </a:prstGeom>
+          <a:solidFill>
+            <a:srgbClr val="0A1F3D"/>
+          </a:solidFill>
+          <a:ln w="15875">
+            <a:solidFill>
+              <a:srgbClr val="0A1F3D"/>
+            </a:solidFill>
+            <a:prstDash val="solid"/>
+          </a:ln>
+          <a:effectLst>
+            <a:outerShdw blurRad="76200" dist="25400" dir="5400000" algn="bl" rotWithShape="0">
+              <a:srgbClr val="000000">
+                <a:alpha val="15000"/>
+              </a:srgbClr>
+            </a:outerShdw>
+          </a:effectLst>
+        </p:spPr>
+      </p:sp>
+      <p:sp>
+        <p:nvSpPr>
+          <p:cNvPr id="49" name="Text 23">
+            <a:extLst>
+              <a:ext uri="{FF2B5EF4-FFF2-40B4-BE49-F238E27FC236}">
+                <a16:creationId xmlns:a16="http://schemas.microsoft.com/office/drawing/2014/main" id="{91499A8B-5C7B-409A-9D4C-051BEA0AD000}"/>
+              </a:ext>
+            </a:extLst>
+          </p:cNvPr>
+          <p:cNvSpPr txBox="1"/>
+          <p:nvPr/>
+        </p:nvSpPr>
+        <p:spPr>
+          <a:xfrm>
+            <a:off x="9891065" y="1618488"/>
+            <a:ext cx="1554480" cy="201168"/>
+          </a:xfrm>
+          <a:prstGeom prst="rect">
+            <a:avLst/>
+          </a:prstGeom>
+          <a:noFill/>
+          <a:ln/>
+        </p:spPr>
+        <p:txBody>
+          <a:bodyPr wrap="square" lIns="0" tIns="0" rIns="0" bIns="0" rtlCol="0" anchor="ctr"/>
+          <a:lstStyle/>
+          <a:p>
+            <a:pPr marL="0" indent="0">
+              <a:buNone/>
+            </a:pPr>
+            <a:r>
+              <a:rPr lang="en-US" sz="1000" b="1" kern="0" spc="200" dirty="0">
+                <a:solidFill>
+                  <a:srgbClr val="E0A243"/>
+                </a:solidFill>
+                <a:latin typeface="Calibri" pitchFamily="34" charset="0"/>
+                <a:ea typeface="Calibri" pitchFamily="34" charset="-122"/>
+                <a:cs typeface="Calibri" pitchFamily="34" charset="-120"/>
+              </a:rPr>
+              <a:t>04</a:t>
+            </a:r>
+            <a:endParaRPr lang="en-US" sz="1000" dirty="0"/>
+          </a:p>
+        </p:txBody>
+      </p:sp>
+      <p:sp>
+        <p:nvSpPr>
+          <p:cNvPr id="51" name="Text 24">
+            <a:extLst>
+              <a:ext uri="{FF2B5EF4-FFF2-40B4-BE49-F238E27FC236}">
+                <a16:creationId xmlns:a16="http://schemas.microsoft.com/office/drawing/2014/main" id="{42EA45EA-737A-79DC-E3D9-0122F9252C63}"/>
+              </a:ext>
+            </a:extLst>
+          </p:cNvPr>
+          <p:cNvSpPr txBox="1"/>
+          <p:nvPr/>
+        </p:nvSpPr>
+        <p:spPr>
+          <a:xfrm>
+            <a:off x="9891065" y="1837944"/>
+            <a:ext cx="1554480" cy="292608"/>
+          </a:xfrm>
+          <a:prstGeom prst="rect">
+            <a:avLst/>
+          </a:prstGeom>
+          <a:noFill/>
+          <a:ln/>
+        </p:spPr>
+        <p:txBody>
+          <a:bodyPr wrap="square" lIns="0" tIns="0" rIns="0" bIns="0" rtlCol="0" anchor="ctr"/>
+          <a:lstStyle/>
+          <a:p>
+            <a:pPr marL="0" indent="0">
+              <a:buNone/>
+            </a:pPr>
+            <a:r>
+              <a:rPr lang="en-US" sz="1500" b="1" dirty="0">
+                <a:solidFill>
+                  <a:srgbClr val="FFFFFF"/>
+                </a:solidFill>
+                <a:latin typeface="Cambria" pitchFamily="34" charset="0"/>
+                <a:ea typeface="Cambria" pitchFamily="34" charset="-122"/>
+                <a:cs typeface="Cambria" pitchFamily="34" charset="-120"/>
+              </a:rPr>
+              <a:t>Blueprint Hub</a:t>
+            </a:r>
+            <a:endParaRPr lang="en-US" sz="1500" dirty="0"/>
+          </a:p>
+        </p:txBody>
+      </p:sp>
+      <p:sp>
+        <p:nvSpPr>
+          <p:cNvPr id="53" name="Text 25">
+            <a:extLst>
+              <a:ext uri="{FF2B5EF4-FFF2-40B4-BE49-F238E27FC236}">
+                <a16:creationId xmlns:a16="http://schemas.microsoft.com/office/drawing/2014/main" id="{953DF72C-3F88-AB66-5D07-C7906F371CA4}"/>
+              </a:ext>
+            </a:extLst>
+          </p:cNvPr>
+          <p:cNvSpPr txBox="1"/>
+          <p:nvPr/>
+        </p:nvSpPr>
+        <p:spPr>
+          <a:xfrm>
+            <a:off x="9891065" y="2148840"/>
+            <a:ext cx="1554480" cy="621792"/>
+          </a:xfrm>
+          <a:prstGeom prst="rect">
+            <a:avLst/>
+          </a:prstGeom>
+          <a:noFill/>
+          <a:ln/>
+        </p:spPr>
+        <p:txBody>
+          <a:bodyPr wrap="square" lIns="0" tIns="0" rIns="0" bIns="0" rtlCol="0" anchor="t"/>
+          <a:lstStyle/>
+          <a:p>
+            <a:pPr marL="0" indent="0">
+              <a:buNone/>
+            </a:pPr>
+            <a:r>
+              <a:rPr lang="en-US" sz="1050" dirty="0">
+                <a:solidFill>
+                  <a:srgbClr val="B9C7DD"/>
+                </a:solidFill>
+                <a:latin typeface="Calibri" pitchFamily="34" charset="0"/>
+                <a:ea typeface="Calibri" pitchFamily="34" charset="-122"/>
+                <a:cs typeface="Calibri" pitchFamily="34" charset="-120"/>
+              </a:rPr>
+              <a:t>Tabbed deliverables saved as version 1.0</a:t>
+            </a:r>
+            <a:endParaRPr lang="en-US" sz="1050" dirty="0"/>
+          </a:p>
+        </p:txBody>
+      </p:sp>
+      <p:sp>
+        <p:nvSpPr>
+          <p:cNvPr id="55" name="Shape 26">
+            <a:extLst>
+              <a:ext uri="{FF2B5EF4-FFF2-40B4-BE49-F238E27FC236}">
+                <a16:creationId xmlns:a16="http://schemas.microsoft.com/office/drawing/2014/main" id="{E92A4F9D-6A50-59B8-C668-9B7545D283F1}"/>
+              </a:ext>
+            </a:extLst>
+          </p:cNvPr>
+          <p:cNvSpPr/>
+          <p:nvPr/>
+        </p:nvSpPr>
+        <p:spPr>
+          <a:xfrm>
+            <a:off x="8382305" y="2834640"/>
+            <a:ext cx="0" cy="594360"/>
+          </a:xfrm>
+          <a:prstGeom prst="line">
+            <a:avLst/>
+          </a:prstGeom>
+          <a:noFill/>
+          <a:ln w="22225">
+            <a:solidFill>
+              <a:srgbClr val="E0A243"/>
+            </a:solidFill>
+            <a:prstDash val="dash"/>
+          </a:ln>
+        </p:spPr>
+      </p:sp>
+      <p:sp>
+        <p:nvSpPr>
+          <p:cNvPr id="57" name="Shape 27">
+            <a:extLst>
+              <a:ext uri="{FF2B5EF4-FFF2-40B4-BE49-F238E27FC236}">
+                <a16:creationId xmlns:a16="http://schemas.microsoft.com/office/drawing/2014/main" id="{02F57C9F-4707-463D-EC2B-431C3C3712BE}"/>
+              </a:ext>
+            </a:extLst>
+          </p:cNvPr>
+          <p:cNvSpPr/>
+          <p:nvPr/>
+        </p:nvSpPr>
+        <p:spPr>
+          <a:xfrm>
+            <a:off x="609905" y="3429000"/>
+            <a:ext cx="10972800" cy="2103120"/>
+          </a:xfrm>
+          <a:prstGeom prst="roundRect">
+            <a:avLst>
+              <a:gd name="adj" fmla="val 3478"/>
+            </a:avLst>
+          </a:prstGeom>
+          <a:solidFill>
+            <a:srgbClr val="FFFFFF"/>
+          </a:solidFill>
+          <a:ln w="12700">
+            <a:solidFill>
+              <a:srgbClr val="D5DBE6"/>
+            </a:solidFill>
+            <a:prstDash val="solid"/>
+          </a:ln>
+        </p:spPr>
+      </p:sp>
+      <p:sp>
+        <p:nvSpPr>
+          <p:cNvPr id="59" name="Text 28">
+            <a:extLst>
+              <a:ext uri="{FF2B5EF4-FFF2-40B4-BE49-F238E27FC236}">
+                <a16:creationId xmlns:a16="http://schemas.microsoft.com/office/drawing/2014/main" id="{1A61F049-0BBD-BFD0-F529-912BD702CD4D}"/>
+              </a:ext>
+            </a:extLst>
+          </p:cNvPr>
+          <p:cNvSpPr txBox="1"/>
+          <p:nvPr/>
+        </p:nvSpPr>
+        <p:spPr>
+          <a:xfrm>
+            <a:off x="838505" y="3557016"/>
+            <a:ext cx="7315200" cy="228600"/>
+          </a:xfrm>
+          <a:prstGeom prst="rect">
+            <a:avLst/>
+          </a:prstGeom>
+          <a:noFill/>
+          <a:ln/>
+        </p:spPr>
+        <p:txBody>
+          <a:bodyPr wrap="square" lIns="0" tIns="0" rIns="0" bIns="0" rtlCol="0" anchor="ctr"/>
+          <a:lstStyle/>
+          <a:p>
+            <a:pPr marL="0" indent="0">
+              <a:buNone/>
+            </a:pPr>
+            <a:r>
+              <a:rPr lang="en-US" sz="1000" b="1" kern="0" spc="200" dirty="0">
+                <a:solidFill>
+                  <a:srgbClr val="5B6B82"/>
+                </a:solidFill>
+                <a:latin typeface="Calibri" pitchFamily="34" charset="0"/>
+                <a:ea typeface="Calibri" pitchFamily="34" charset="-122"/>
+                <a:cs typeface="Calibri" pitchFamily="34" charset="-120"/>
+              </a:rPr>
+              <a:t>INSIDE STEP 03  ·  PARALLEL MULTI-AGENT SYNTHESIS</a:t>
+            </a:r>
+            <a:endParaRPr lang="en-US" sz="1000" dirty="0"/>
+          </a:p>
+        </p:txBody>
+      </p:sp>
+      <p:sp>
+        <p:nvSpPr>
+          <p:cNvPr id="61" name="Shape 29">
+            <a:extLst>
+              <a:ext uri="{FF2B5EF4-FFF2-40B4-BE49-F238E27FC236}">
+                <a16:creationId xmlns:a16="http://schemas.microsoft.com/office/drawing/2014/main" id="{DCEB0ED3-D4F3-E0A8-8799-ADE4D396F9D5}"/>
+              </a:ext>
+            </a:extLst>
+          </p:cNvPr>
+          <p:cNvSpPr/>
+          <p:nvPr/>
+        </p:nvSpPr>
+        <p:spPr>
+          <a:xfrm>
+            <a:off x="838505" y="3931920"/>
+            <a:ext cx="2286000" cy="1371600"/>
+          </a:xfrm>
+          <a:prstGeom prst="roundRect">
+            <a:avLst>
+              <a:gd name="adj" fmla="val 4000"/>
+            </a:avLst>
+          </a:prstGeom>
+          <a:solidFill>
+            <a:srgbClr val="FBF1DE"/>
+          </a:solidFill>
+          <a:ln w="15875">
+            <a:solidFill>
+              <a:srgbClr val="E0A243"/>
+            </a:solidFill>
+            <a:prstDash val="solid"/>
+          </a:ln>
+        </p:spPr>
+      </p:sp>
+      <p:sp>
+        <p:nvSpPr>
+          <p:cNvPr id="63" name="Text 30">
+            <a:extLst>
+              <a:ext uri="{FF2B5EF4-FFF2-40B4-BE49-F238E27FC236}">
+                <a16:creationId xmlns:a16="http://schemas.microsoft.com/office/drawing/2014/main" id="{99BBAA99-DCB7-B91B-C8BC-BC9E610ADAA5}"/>
+              </a:ext>
+            </a:extLst>
+          </p:cNvPr>
+          <p:cNvSpPr txBox="1"/>
+          <p:nvPr/>
+        </p:nvSpPr>
+        <p:spPr>
+          <a:xfrm>
+            <a:off x="975665" y="4096512"/>
+            <a:ext cx="2011680" cy="457200"/>
+          </a:xfrm>
+          <a:prstGeom prst="rect">
+            <a:avLst/>
+          </a:prstGeom>
+          <a:noFill/>
+          <a:ln/>
+        </p:spPr>
+        <p:txBody>
+          <a:bodyPr wrap="square" lIns="0" tIns="0" rIns="0" bIns="0" rtlCol="0" anchor="t"/>
+          <a:lstStyle/>
+          <a:p>
+            <a:pPr marL="0" indent="0">
+              <a:buNone/>
+            </a:pPr>
+            <a:r>
+              <a:rPr lang="en-US" sz="1400" b="1" dirty="0">
+                <a:solidFill>
+                  <a:srgbClr val="0A1F3D"/>
+                </a:solidFill>
+                <a:latin typeface="Cambria" pitchFamily="34" charset="0"/>
+                <a:ea typeface="Cambria" pitchFamily="34" charset="-122"/>
+                <a:cs typeface="Cambria" pitchFamily="34" charset="-120"/>
+              </a:rPr>
+              <a:t>Shared discovery answers</a:t>
+            </a:r>
+            <a:endParaRPr lang="en-US" sz="1400" dirty="0"/>
+          </a:p>
+        </p:txBody>
+      </p:sp>
+      <p:sp>
+        <p:nvSpPr>
+          <p:cNvPr id="65" name="Text 31">
+            <a:extLst>
+              <a:ext uri="{FF2B5EF4-FFF2-40B4-BE49-F238E27FC236}">
+                <a16:creationId xmlns:a16="http://schemas.microsoft.com/office/drawing/2014/main" id="{97C2AC04-EE6E-71E1-4BC5-3BC0995B92ED}"/>
+              </a:ext>
+            </a:extLst>
+          </p:cNvPr>
+          <p:cNvSpPr txBox="1"/>
+          <p:nvPr/>
+        </p:nvSpPr>
+        <p:spPr>
+          <a:xfrm>
+            <a:off x="975665" y="4590288"/>
+            <a:ext cx="2011680" cy="640080"/>
+          </a:xfrm>
+          <a:prstGeom prst="rect">
+            <a:avLst/>
+          </a:prstGeom>
+          <a:noFill/>
+          <a:ln/>
+        </p:spPr>
+        <p:txBody>
+          <a:bodyPr wrap="square" lIns="0" tIns="0" rIns="0" bIns="0" rtlCol="0" anchor="t"/>
+          <a:lstStyle/>
+          <a:p>
+            <a:pPr marL="0" indent="0">
+              <a:buNone/>
+            </a:pPr>
+            <a:r>
+              <a:rPr lang="en-US" sz="1050" dirty="0">
+                <a:solidFill>
+                  <a:srgbClr val="5B6B82"/>
+                </a:solidFill>
+                <a:latin typeface="Calibri" pitchFamily="34" charset="0"/>
+                <a:ea typeface="Calibri" pitchFamily="34" charset="-122"/>
+                <a:cs typeface="Calibri" pitchFamily="34" charset="-120"/>
+              </a:rPr>
+              <a:t>Five of five clarified. One source of truth keeps every deliverable consistent.</a:t>
+            </a:r>
+            <a:endParaRPr lang="en-US" sz="1050" dirty="0"/>
+          </a:p>
+        </p:txBody>
+      </p:sp>
+      <p:sp>
+        <p:nvSpPr>
+          <p:cNvPr id="67" name="Shape 32">
+            <a:extLst>
+              <a:ext uri="{FF2B5EF4-FFF2-40B4-BE49-F238E27FC236}">
+                <a16:creationId xmlns:a16="http://schemas.microsoft.com/office/drawing/2014/main" id="{14DA09C3-257A-4397-D18C-494816C95E85}"/>
+              </a:ext>
+            </a:extLst>
+          </p:cNvPr>
+          <p:cNvSpPr/>
+          <p:nvPr/>
+        </p:nvSpPr>
+        <p:spPr>
+          <a:xfrm>
+            <a:off x="3673145" y="3931920"/>
+            <a:ext cx="3200400" cy="384048"/>
+          </a:xfrm>
+          <a:prstGeom prst="roundRect">
+            <a:avLst>
+              <a:gd name="adj" fmla="val 14286"/>
+            </a:avLst>
           </a:prstGeom>
           <a:solidFill>
             <a:srgbClr val="0A1F3D"/>
@@ -4730,143 +5880,53 @@
             </a:solidFill>
             <a:prstDash val="solid"/>
           </a:ln>
-          <a:effectLst>
-            <a:outerShdw blurRad="101600" dist="25400" dir="5400000" algn="bl" rotWithShape="0">
-              <a:srgbClr val="000000">
-                <a:alpha val="12000"/>
-              </a:srgbClr>
-            </a:outerShdw>
-          </a:effectLst>
-        </p:spPr>
-      </p:sp>
-      <p:sp>
-        <p:nvSpPr>
-          <p:cNvPr id="5" name="Text 3"/>
-          <p:cNvSpPr txBox="1"/>
-          <p:nvPr/>
-        </p:nvSpPr>
-        <p:spPr>
-          <a:xfrm>
-            <a:off x="822960" y="2148840"/>
-            <a:ext cx="1097280" cy="502920"/>
-          </a:xfrm>
-          <a:prstGeom prst="rect">
-            <a:avLst/>
-          </a:prstGeom>
-          <a:noFill/>
-          <a:ln/>
-        </p:spPr>
-        <p:txBody>
-          <a:bodyPr wrap="square" lIns="0" tIns="0" rIns="0" bIns="0" rtlCol="0" anchor="ctr"/>
+        </p:spPr>
+      </p:sp>
+      <p:sp>
+        <p:nvSpPr>
+          <p:cNvPr id="69" name="Text 33">
+            <a:extLst>
+              <a:ext uri="{FF2B5EF4-FFF2-40B4-BE49-F238E27FC236}">
+                <a16:creationId xmlns:a16="http://schemas.microsoft.com/office/drawing/2014/main" id="{29441D3A-AE57-3471-B659-F48B6FEBD584}"/>
+              </a:ext>
+            </a:extLst>
+          </p:cNvPr>
+          <p:cNvSpPr txBox="1"/>
+          <p:nvPr/>
+        </p:nvSpPr>
+        <p:spPr>
+          <a:xfrm>
+            <a:off x="3810305" y="3931920"/>
+            <a:ext cx="2926080" cy="384048"/>
+          </a:xfrm>
+          <a:prstGeom prst="rect">
+            <a:avLst/>
+          </a:prstGeom>
+          <a:noFill/>
+          <a:ln/>
+        </p:spPr>
+        <p:txBody>
+          <a:bodyPr wrap="square" lIns="0" tIns="0" rIns="0" bIns="0" rtlCol="0" anchor="ctr">
+            <a:normAutofit/>
+          </a:bodyPr>
           <a:lstStyle/>
           <a:p>
             <a:pPr marL="0" indent="0">
               <a:buNone/>
             </a:pPr>
             <a:r>
-              <a:rPr lang="en-US" sz="3000" b="1" dirty="0">
-                <a:solidFill>
-                  <a:srgbClr val="E0A243"/>
-                </a:solidFill>
-                <a:latin typeface="Cambria" pitchFamily="34" charset="0"/>
-                <a:ea typeface="Cambria" pitchFamily="34" charset="-122"/>
-                <a:cs typeface="Cambria" pitchFamily="34" charset="-120"/>
-              </a:rPr>
-              <a:t>01</a:t>
-            </a:r>
-            <a:endParaRPr lang="en-US" sz="3000" dirty="0"/>
-          </a:p>
-        </p:txBody>
-      </p:sp>
-      <p:pic>
-        <p:nvPicPr>
-          <p:cNvPr id="6" name="Image 0" descr="preencoded.png"/>
-          <p:cNvPicPr>
-            <a:picLocks noChangeAspect="1"/>
-          </p:cNvPicPr>
-          <p:nvPr/>
-        </p:nvPicPr>
-        <p:blipFill>
-          <a:blip r:embed="rId3"/>
-          <a:stretch>
-            <a:fillRect/>
-          </a:stretch>
-        </p:blipFill>
-        <p:spPr>
-          <a:xfrm>
-            <a:off x="2377440" y="2194560"/>
-            <a:ext cx="411480" cy="411480"/>
-          </a:xfrm>
-          <a:prstGeom prst="rect">
-            <a:avLst/>
-          </a:prstGeom>
-        </p:spPr>
-      </p:pic>
-      <p:sp>
-        <p:nvSpPr>
-          <p:cNvPr id="7" name="Text 4"/>
-          <p:cNvSpPr txBox="1"/>
-          <p:nvPr/>
-        </p:nvSpPr>
-        <p:spPr>
-          <a:xfrm>
-            <a:off x="822960" y="2834640"/>
-            <a:ext cx="2011680" cy="411480"/>
-          </a:xfrm>
-          <a:prstGeom prst="rect">
-            <a:avLst/>
-          </a:prstGeom>
-          <a:noFill/>
-          <a:ln/>
-        </p:spPr>
-        <p:txBody>
-          <a:bodyPr wrap="square" lIns="0" tIns="0" rIns="0" bIns="0" rtlCol="0" anchor="ctr"/>
-          <a:lstStyle/>
-          <a:p>
-            <a:pPr marL="0" indent="0">
-              <a:buNone/>
-            </a:pPr>
-            <a:r>
-              <a:rPr lang="en-US" sz="2100" b="1" dirty="0">
+              <a:rPr lang="en-US" sz="1150" b="1" dirty="0">
                 <a:solidFill>
                   <a:srgbClr val="FFFFFF"/>
                 </a:solidFill>
-                <a:latin typeface="Cambria" pitchFamily="34" charset="0"/>
-                <a:ea typeface="Cambria" pitchFamily="34" charset="-122"/>
-                <a:cs typeface="Cambria" pitchFamily="34" charset="-120"/>
-              </a:rPr>
-              <a:t>Intake</a:t>
-            </a:r>
-            <a:endParaRPr lang="en-US" sz="2100" dirty="0"/>
-          </a:p>
-        </p:txBody>
-      </p:sp>
-      <p:sp>
-        <p:nvSpPr>
-          <p:cNvPr id="8" name="Text 5"/>
-          <p:cNvSpPr txBox="1"/>
-          <p:nvPr/>
-        </p:nvSpPr>
-        <p:spPr>
-          <a:xfrm>
-            <a:off x="822960" y="3291840"/>
-            <a:ext cx="2011680" cy="1508760"/>
-          </a:xfrm>
-          <a:prstGeom prst="rect">
-            <a:avLst/>
-          </a:prstGeom>
-          <a:noFill/>
-          <a:ln/>
-        </p:spPr>
-        <p:txBody>
-          <a:bodyPr wrap="square" lIns="0" tIns="0" rIns="0" bIns="0" rtlCol="0" anchor="t"/>
-          <a:lstStyle/>
-          <a:p>
-            <a:pPr marL="0" indent="0">
-              <a:buNone/>
-            </a:pPr>
-            <a:r>
-              <a:rPr lang="en-US" sz="1400" dirty="0">
+                <a:latin typeface="Calibri" pitchFamily="34" charset="0"/>
+                <a:ea typeface="Calibri" pitchFamily="34" charset="-122"/>
+                <a:cs typeface="Calibri" pitchFamily="34" charset="-120"/>
+              </a:rPr>
+              <a:t>BRD &amp; stakeholder agent</a:t>
+            </a:r>
+            <a:r>
+              <a:rPr lang="en-US" sz="1000" dirty="0">
                 <a:solidFill>
                   <a:srgbClr val="B9C7DD"/>
                 </a:solidFill>
@@ -4874,49 +5934,63 @@
                 <a:ea typeface="Calibri" pitchFamily="34" charset="-122"/>
                 <a:cs typeface="Calibri" pitchFamily="34" charset="-120"/>
               </a:rPr>
-              <a:t>A one-line problem, a document, or an industry template. Domain and scale are classified automatically.</a:t>
-            </a:r>
-            <a:endParaRPr lang="en-US" sz="1400" dirty="0"/>
-          </a:p>
-        </p:txBody>
-      </p:sp>
-      <p:pic>
-        <p:nvPicPr>
-          <p:cNvPr id="9" name="Image 1" descr="preencoded.png"/>
-          <p:cNvPicPr>
-            <a:picLocks noChangeAspect="1"/>
-          </p:cNvPicPr>
-          <p:nvPr/>
-        </p:nvPicPr>
-        <p:blipFill>
-          <a:blip r:embed="rId4"/>
-          <a:stretch>
-            <a:fillRect/>
-          </a:stretch>
-        </p:blipFill>
-        <p:spPr>
-          <a:xfrm>
-            <a:off x="3081528" y="3291840"/>
-            <a:ext cx="237744" cy="274320"/>
-          </a:xfrm>
-          <a:prstGeom prst="rect">
-            <a:avLst/>
-          </a:prstGeom>
-        </p:spPr>
-      </p:pic>
-      <p:sp>
-        <p:nvSpPr>
-          <p:cNvPr id="10" name="Shape 6"/>
+              <a:t>   Drafts the BRD</a:t>
+            </a:r>
+            <a:endParaRPr lang="en-US" sz="1150" dirty="0"/>
+          </a:p>
+        </p:txBody>
+      </p:sp>
+      <p:sp>
+        <p:nvSpPr>
+          <p:cNvPr id="71" name="Shape 34">
+            <a:extLst>
+              <a:ext uri="{FF2B5EF4-FFF2-40B4-BE49-F238E27FC236}">
+                <a16:creationId xmlns:a16="http://schemas.microsoft.com/office/drawing/2014/main" id="{31799878-40C2-89AB-A7B1-3157BE42BF64}"/>
+              </a:ext>
+            </a:extLst>
+          </p:cNvPr>
           <p:cNvSpPr/>
           <p:nvPr/>
         </p:nvSpPr>
         <p:spPr>
           <a:xfrm>
-            <a:off x="3355848" y="1920240"/>
-            <a:ext cx="2514600" cy="3017520"/>
-          </a:xfrm>
-          <a:prstGeom prst="rect">
-            <a:avLst/>
+            <a:off x="3179369" y="4123944"/>
+            <a:ext cx="438912" cy="0"/>
+          </a:xfrm>
+          <a:prstGeom prst="line">
+            <a:avLst/>
+          </a:prstGeom>
+          <a:noFill/>
+          <a:ln w="22225">
+            <a:solidFill>
+              <a:srgbClr val="E0A243"/>
+            </a:solidFill>
+            <a:prstDash val="solid"/>
+            <a:tailEnd type="triangle"/>
+          </a:ln>
+        </p:spPr>
+      </p:sp>
+      <p:sp>
+        <p:nvSpPr>
+          <p:cNvPr id="73" name="Shape 35">
+            <a:extLst>
+              <a:ext uri="{FF2B5EF4-FFF2-40B4-BE49-F238E27FC236}">
+                <a16:creationId xmlns:a16="http://schemas.microsoft.com/office/drawing/2014/main" id="{09B17B7E-FC2F-957D-A640-1347F8A7A22C}"/>
+              </a:ext>
+            </a:extLst>
+          </p:cNvPr>
+          <p:cNvSpPr/>
+          <p:nvPr/>
+        </p:nvSpPr>
+        <p:spPr>
+          <a:xfrm>
+            <a:off x="3673145" y="4425696"/>
+            <a:ext cx="3200400" cy="384048"/>
+          </a:xfrm>
+          <a:prstGeom prst="roundRect">
+            <a:avLst>
+              <a:gd name="adj" fmla="val 14286"/>
+            </a:avLst>
           </a:prstGeom>
           <a:solidFill>
             <a:srgbClr val="0A1F3D"/>
@@ -4927,143 +6001,53 @@
             </a:solidFill>
             <a:prstDash val="solid"/>
           </a:ln>
-          <a:effectLst>
-            <a:outerShdw blurRad="101600" dist="25400" dir="5400000" algn="bl" rotWithShape="0">
-              <a:srgbClr val="000000">
-                <a:alpha val="12000"/>
-              </a:srgbClr>
-            </a:outerShdw>
-          </a:effectLst>
-        </p:spPr>
-      </p:sp>
-      <p:sp>
-        <p:nvSpPr>
-          <p:cNvPr id="11" name="Text 7"/>
-          <p:cNvSpPr txBox="1"/>
-          <p:nvPr/>
-        </p:nvSpPr>
-        <p:spPr>
-          <a:xfrm>
-            <a:off x="3630168" y="2148840"/>
-            <a:ext cx="1097280" cy="502920"/>
-          </a:xfrm>
-          <a:prstGeom prst="rect">
-            <a:avLst/>
-          </a:prstGeom>
-          <a:noFill/>
-          <a:ln/>
-        </p:spPr>
-        <p:txBody>
-          <a:bodyPr wrap="square" lIns="0" tIns="0" rIns="0" bIns="0" rtlCol="0" anchor="ctr"/>
+        </p:spPr>
+      </p:sp>
+      <p:sp>
+        <p:nvSpPr>
+          <p:cNvPr id="75" name="Text 36">
+            <a:extLst>
+              <a:ext uri="{FF2B5EF4-FFF2-40B4-BE49-F238E27FC236}">
+                <a16:creationId xmlns:a16="http://schemas.microsoft.com/office/drawing/2014/main" id="{68A9DEC7-7194-12DE-55B3-315620BC66DA}"/>
+              </a:ext>
+            </a:extLst>
+          </p:cNvPr>
+          <p:cNvSpPr txBox="1"/>
+          <p:nvPr/>
+        </p:nvSpPr>
+        <p:spPr>
+          <a:xfrm>
+            <a:off x="3810305" y="4425696"/>
+            <a:ext cx="2926080" cy="384048"/>
+          </a:xfrm>
+          <a:prstGeom prst="rect">
+            <a:avLst/>
+          </a:prstGeom>
+          <a:noFill/>
+          <a:ln/>
+        </p:spPr>
+        <p:txBody>
+          <a:bodyPr wrap="square" lIns="0" tIns="0" rIns="0" bIns="0" rtlCol="0" anchor="ctr">
+            <a:normAutofit/>
+          </a:bodyPr>
           <a:lstStyle/>
           <a:p>
             <a:pPr marL="0" indent="0">
               <a:buNone/>
             </a:pPr>
             <a:r>
-              <a:rPr lang="en-US" sz="3000" b="1" dirty="0">
-                <a:solidFill>
-                  <a:srgbClr val="E0A243"/>
-                </a:solidFill>
-                <a:latin typeface="Cambria" pitchFamily="34" charset="0"/>
-                <a:ea typeface="Cambria" pitchFamily="34" charset="-122"/>
-                <a:cs typeface="Cambria" pitchFamily="34" charset="-120"/>
-              </a:rPr>
-              <a:t>02</a:t>
-            </a:r>
-            <a:endParaRPr lang="en-US" sz="3000" dirty="0"/>
-          </a:p>
-        </p:txBody>
-      </p:sp>
-      <p:pic>
-        <p:nvPicPr>
-          <p:cNvPr id="12" name="Image 2" descr="preencoded.png"/>
-          <p:cNvPicPr>
-            <a:picLocks noChangeAspect="1"/>
-          </p:cNvPicPr>
-          <p:nvPr/>
-        </p:nvPicPr>
-        <p:blipFill>
-          <a:blip r:embed="rId5"/>
-          <a:stretch>
-            <a:fillRect/>
-          </a:stretch>
-        </p:blipFill>
-        <p:spPr>
-          <a:xfrm>
-            <a:off x="5184648" y="2194560"/>
-            <a:ext cx="411480" cy="411480"/>
-          </a:xfrm>
-          <a:prstGeom prst="rect">
-            <a:avLst/>
-          </a:prstGeom>
-        </p:spPr>
-      </p:pic>
-      <p:sp>
-        <p:nvSpPr>
-          <p:cNvPr id="13" name="Text 8"/>
-          <p:cNvSpPr txBox="1"/>
-          <p:nvPr/>
-        </p:nvSpPr>
-        <p:spPr>
-          <a:xfrm>
-            <a:off x="3630168" y="2834640"/>
-            <a:ext cx="2011680" cy="411480"/>
-          </a:xfrm>
-          <a:prstGeom prst="rect">
-            <a:avLst/>
-          </a:prstGeom>
-          <a:noFill/>
-          <a:ln/>
-        </p:spPr>
-        <p:txBody>
-          <a:bodyPr wrap="square" lIns="0" tIns="0" rIns="0" bIns="0" rtlCol="0" anchor="ctr"/>
-          <a:lstStyle/>
-          <a:p>
-            <a:pPr marL="0" indent="0">
-              <a:buNone/>
-            </a:pPr>
-            <a:r>
-              <a:rPr lang="en-US" sz="2100" b="1" dirty="0">
+              <a:rPr lang="en-US" sz="1150" b="1" dirty="0">
                 <a:solidFill>
                   <a:srgbClr val="FFFFFF"/>
                 </a:solidFill>
-                <a:latin typeface="Cambria" pitchFamily="34" charset="0"/>
-                <a:ea typeface="Cambria" pitchFamily="34" charset="-122"/>
-                <a:cs typeface="Cambria" pitchFamily="34" charset="-120"/>
-              </a:rPr>
-              <a:t>Discovery</a:t>
-            </a:r>
-            <a:endParaRPr lang="en-US" sz="2100" dirty="0"/>
-          </a:p>
-        </p:txBody>
-      </p:sp>
-      <p:sp>
-        <p:nvSpPr>
-          <p:cNvPr id="14" name="Text 9"/>
-          <p:cNvSpPr txBox="1"/>
-          <p:nvPr/>
-        </p:nvSpPr>
-        <p:spPr>
-          <a:xfrm>
-            <a:off x="3630168" y="3291840"/>
-            <a:ext cx="2011680" cy="1508760"/>
-          </a:xfrm>
-          <a:prstGeom prst="rect">
-            <a:avLst/>
-          </a:prstGeom>
-          <a:noFill/>
-          <a:ln/>
-        </p:spPr>
-        <p:txBody>
-          <a:bodyPr wrap="square" lIns="0" tIns="0" rIns="0" bIns="0" rtlCol="0" anchor="t"/>
-          <a:lstStyle/>
-          <a:p>
-            <a:pPr marL="0" indent="0">
-              <a:buNone/>
-            </a:pPr>
-            <a:r>
-              <a:rPr lang="en-US" sz="1400" dirty="0">
+                <a:latin typeface="Calibri" pitchFamily="34" charset="0"/>
+                <a:ea typeface="Calibri" pitchFamily="34" charset="-122"/>
+                <a:cs typeface="Calibri" pitchFamily="34" charset="-120"/>
+              </a:rPr>
+              <a:t>Architecture agent</a:t>
+            </a:r>
+            <a:r>
+              <a:rPr lang="en-US" sz="1000" dirty="0">
                 <a:solidFill>
                   <a:srgbClr val="B9C7DD"/>
                 </a:solidFill>
@@ -5071,49 +6055,63 @@
                 <a:ea typeface="Calibri" pitchFamily="34" charset="-122"/>
                 <a:cs typeface="Calibri" pitchFamily="34" charset="-120"/>
               </a:rPr>
-              <a:t>An AI business analyst asks five targeted questions: stakeholders, compliance, integrations, budget, scale.</a:t>
-            </a:r>
-            <a:endParaRPr lang="en-US" sz="1400" dirty="0"/>
-          </a:p>
-        </p:txBody>
-      </p:sp>
-      <p:pic>
-        <p:nvPicPr>
-          <p:cNvPr id="15" name="Image 3" descr="preencoded.png"/>
-          <p:cNvPicPr>
-            <a:picLocks noChangeAspect="1"/>
-          </p:cNvPicPr>
-          <p:nvPr/>
-        </p:nvPicPr>
-        <p:blipFill>
-          <a:blip r:embed="rId4"/>
-          <a:stretch>
-            <a:fillRect/>
-          </a:stretch>
-        </p:blipFill>
-        <p:spPr>
-          <a:xfrm>
-            <a:off x="5888736" y="3291840"/>
-            <a:ext cx="237744" cy="274320"/>
-          </a:xfrm>
-          <a:prstGeom prst="rect">
-            <a:avLst/>
-          </a:prstGeom>
-        </p:spPr>
-      </p:pic>
-      <p:sp>
-        <p:nvSpPr>
-          <p:cNvPr id="16" name="Shape 10"/>
+              <a:t>   Designs the system and data</a:t>
+            </a:r>
+            <a:endParaRPr lang="en-US" sz="1150" dirty="0"/>
+          </a:p>
+        </p:txBody>
+      </p:sp>
+      <p:sp>
+        <p:nvSpPr>
+          <p:cNvPr id="77" name="Shape 37">
+            <a:extLst>
+              <a:ext uri="{FF2B5EF4-FFF2-40B4-BE49-F238E27FC236}">
+                <a16:creationId xmlns:a16="http://schemas.microsoft.com/office/drawing/2014/main" id="{3A4EE6C0-A159-A3AD-5AA8-6938D5EF9DDF}"/>
+              </a:ext>
+            </a:extLst>
+          </p:cNvPr>
           <p:cNvSpPr/>
           <p:nvPr/>
         </p:nvSpPr>
         <p:spPr>
           <a:xfrm>
-            <a:off x="6163056" y="1920240"/>
-            <a:ext cx="2514600" cy="3017520"/>
-          </a:xfrm>
-          <a:prstGeom prst="rect">
-            <a:avLst/>
+            <a:off x="3179369" y="4617720"/>
+            <a:ext cx="438912" cy="0"/>
+          </a:xfrm>
+          <a:prstGeom prst="line">
+            <a:avLst/>
+          </a:prstGeom>
+          <a:noFill/>
+          <a:ln w="22225">
+            <a:solidFill>
+              <a:srgbClr val="E0A243"/>
+            </a:solidFill>
+            <a:prstDash val="solid"/>
+            <a:tailEnd type="triangle"/>
+          </a:ln>
+        </p:spPr>
+      </p:sp>
+      <p:sp>
+        <p:nvSpPr>
+          <p:cNvPr id="79" name="Shape 38">
+            <a:extLst>
+              <a:ext uri="{FF2B5EF4-FFF2-40B4-BE49-F238E27FC236}">
+                <a16:creationId xmlns:a16="http://schemas.microsoft.com/office/drawing/2014/main" id="{CF07FAAD-D2FA-DF90-520E-B14D05E1C55D}"/>
+              </a:ext>
+            </a:extLst>
+          </p:cNvPr>
+          <p:cNvSpPr/>
+          <p:nvPr/>
+        </p:nvSpPr>
+        <p:spPr>
+          <a:xfrm>
+            <a:off x="3673145" y="4919472"/>
+            <a:ext cx="3200400" cy="384048"/>
+          </a:xfrm>
+          <a:prstGeom prst="roundRect">
+            <a:avLst>
+              <a:gd name="adj" fmla="val 14286"/>
+            </a:avLst>
           </a:prstGeom>
           <a:solidFill>
             <a:srgbClr val="0A1F3D"/>
@@ -5124,143 +6122,53 @@
             </a:solidFill>
             <a:prstDash val="solid"/>
           </a:ln>
-          <a:effectLst>
-            <a:outerShdw blurRad="101600" dist="25400" dir="5400000" algn="bl" rotWithShape="0">
-              <a:srgbClr val="000000">
-                <a:alpha val="12000"/>
-              </a:srgbClr>
-            </a:outerShdw>
-          </a:effectLst>
-        </p:spPr>
-      </p:sp>
-      <p:sp>
-        <p:nvSpPr>
-          <p:cNvPr id="17" name="Text 11"/>
-          <p:cNvSpPr txBox="1"/>
-          <p:nvPr/>
-        </p:nvSpPr>
-        <p:spPr>
-          <a:xfrm>
-            <a:off x="6437376" y="2148840"/>
-            <a:ext cx="1097280" cy="502920"/>
-          </a:xfrm>
-          <a:prstGeom prst="rect">
-            <a:avLst/>
-          </a:prstGeom>
-          <a:noFill/>
-          <a:ln/>
-        </p:spPr>
-        <p:txBody>
-          <a:bodyPr wrap="square" lIns="0" tIns="0" rIns="0" bIns="0" rtlCol="0" anchor="ctr"/>
+        </p:spPr>
+      </p:sp>
+      <p:sp>
+        <p:nvSpPr>
+          <p:cNvPr id="81" name="Text 39">
+            <a:extLst>
+              <a:ext uri="{FF2B5EF4-FFF2-40B4-BE49-F238E27FC236}">
+                <a16:creationId xmlns:a16="http://schemas.microsoft.com/office/drawing/2014/main" id="{C22CB02D-802C-B42C-742F-B7409D5F7537}"/>
+              </a:ext>
+            </a:extLst>
+          </p:cNvPr>
+          <p:cNvSpPr txBox="1"/>
+          <p:nvPr/>
+        </p:nvSpPr>
+        <p:spPr>
+          <a:xfrm>
+            <a:off x="3810305" y="4919472"/>
+            <a:ext cx="2926080" cy="384048"/>
+          </a:xfrm>
+          <a:prstGeom prst="rect">
+            <a:avLst/>
+          </a:prstGeom>
+          <a:noFill/>
+          <a:ln/>
+        </p:spPr>
+        <p:txBody>
+          <a:bodyPr wrap="square" lIns="0" tIns="0" rIns="0" bIns="0" rtlCol="0" anchor="ctr">
+            <a:normAutofit/>
+          </a:bodyPr>
           <a:lstStyle/>
           <a:p>
             <a:pPr marL="0" indent="0">
               <a:buNone/>
             </a:pPr>
             <a:r>
-              <a:rPr lang="en-US" sz="3000" b="1" dirty="0">
-                <a:solidFill>
-                  <a:srgbClr val="E0A243"/>
-                </a:solidFill>
-                <a:latin typeface="Cambria" pitchFamily="34" charset="0"/>
-                <a:ea typeface="Cambria" pitchFamily="34" charset="-122"/>
-                <a:cs typeface="Cambria" pitchFamily="34" charset="-120"/>
-              </a:rPr>
-              <a:t>03</a:t>
-            </a:r>
-            <a:endParaRPr lang="en-US" sz="3000" dirty="0"/>
-          </a:p>
-        </p:txBody>
-      </p:sp>
-      <p:pic>
-        <p:nvPicPr>
-          <p:cNvPr id="18" name="Image 4" descr="preencoded.png"/>
-          <p:cNvPicPr>
-            <a:picLocks noChangeAspect="1"/>
-          </p:cNvPicPr>
-          <p:nvPr/>
-        </p:nvPicPr>
-        <p:blipFill>
-          <a:blip r:embed="rId6"/>
-          <a:stretch>
-            <a:fillRect/>
-          </a:stretch>
-        </p:blipFill>
-        <p:spPr>
-          <a:xfrm>
-            <a:off x="7991856" y="2194560"/>
-            <a:ext cx="411480" cy="411480"/>
-          </a:xfrm>
-          <a:prstGeom prst="rect">
-            <a:avLst/>
-          </a:prstGeom>
-        </p:spPr>
-      </p:pic>
-      <p:sp>
-        <p:nvSpPr>
-          <p:cNvPr id="19" name="Text 12"/>
-          <p:cNvSpPr txBox="1"/>
-          <p:nvPr/>
-        </p:nvSpPr>
-        <p:spPr>
-          <a:xfrm>
-            <a:off x="6437376" y="2834640"/>
-            <a:ext cx="2011680" cy="411480"/>
-          </a:xfrm>
-          <a:prstGeom prst="rect">
-            <a:avLst/>
-          </a:prstGeom>
-          <a:noFill/>
-          <a:ln/>
-        </p:spPr>
-        <p:txBody>
-          <a:bodyPr wrap="square" lIns="0" tIns="0" rIns="0" bIns="0" rtlCol="0" anchor="ctr"/>
-          <a:lstStyle/>
-          <a:p>
-            <a:pPr marL="0" indent="0">
-              <a:buNone/>
-            </a:pPr>
-            <a:r>
-              <a:rPr lang="en-US" sz="2100" b="1" dirty="0">
+              <a:rPr lang="en-US" sz="1150" b="1" dirty="0">
                 <a:solidFill>
                   <a:srgbClr val="FFFFFF"/>
                 </a:solidFill>
-                <a:latin typeface="Cambria" pitchFamily="34" charset="0"/>
-                <a:ea typeface="Cambria" pitchFamily="34" charset="-122"/>
-                <a:cs typeface="Cambria" pitchFamily="34" charset="-120"/>
-              </a:rPr>
-              <a:t>Synthesis</a:t>
-            </a:r>
-            <a:endParaRPr lang="en-US" sz="2100" dirty="0"/>
-          </a:p>
-        </p:txBody>
-      </p:sp>
-      <p:sp>
-        <p:nvSpPr>
-          <p:cNvPr id="20" name="Text 13"/>
-          <p:cNvSpPr txBox="1"/>
-          <p:nvPr/>
-        </p:nvSpPr>
-        <p:spPr>
-          <a:xfrm>
-            <a:off x="6437376" y="3291840"/>
-            <a:ext cx="2011680" cy="1508760"/>
-          </a:xfrm>
-          <a:prstGeom prst="rect">
-            <a:avLst/>
-          </a:prstGeom>
-          <a:noFill/>
-          <a:ln/>
-        </p:spPr>
-        <p:txBody>
-          <a:bodyPr wrap="square" lIns="0" tIns="0" rIns="0" bIns="0" rtlCol="0" anchor="t"/>
-          <a:lstStyle/>
-          <a:p>
-            <a:pPr marL="0" indent="0">
-              <a:buNone/>
-            </a:pPr>
-            <a:r>
-              <a:rPr lang="en-US" sz="1400" dirty="0">
+                <a:latin typeface="Calibri" pitchFamily="34" charset="0"/>
+                <a:ea typeface="Calibri" pitchFamily="34" charset="-122"/>
+                <a:cs typeface="Calibri" pitchFamily="34" charset="-120"/>
+              </a:rPr>
+              <a:t>Planning engine</a:t>
+            </a:r>
+            <a:r>
+              <a:rPr lang="en-US" sz="1000" dirty="0">
                 <a:solidFill>
                   <a:srgbClr val="B9C7DD"/>
                 </a:solidFill>
@@ -5268,223 +6176,62 @@
                 <a:ea typeface="Calibri" pitchFamily="34" charset="-122"/>
                 <a:cs typeface="Calibri" pitchFamily="34" charset="-120"/>
               </a:rPr>
-              <a:t>Parallel AI agents compile every deliverable at once, with live progress telemetry.</a:t>
-            </a:r>
-            <a:endParaRPr lang="en-US" sz="1400" dirty="0"/>
-          </a:p>
-        </p:txBody>
-      </p:sp>
-      <p:pic>
-        <p:nvPicPr>
-          <p:cNvPr id="21" name="Image 5" descr="preencoded.png"/>
-          <p:cNvPicPr>
-            <a:picLocks noChangeAspect="1"/>
-          </p:cNvPicPr>
-          <p:nvPr/>
-        </p:nvPicPr>
-        <p:blipFill>
-          <a:blip r:embed="rId4"/>
-          <a:stretch>
-            <a:fillRect/>
-          </a:stretch>
-        </p:blipFill>
-        <p:spPr>
-          <a:xfrm>
-            <a:off x="8695944" y="3291840"/>
-            <a:ext cx="237744" cy="274320"/>
-          </a:xfrm>
-          <a:prstGeom prst="rect">
-            <a:avLst/>
-          </a:prstGeom>
-        </p:spPr>
-      </p:pic>
-      <p:sp>
-        <p:nvSpPr>
-          <p:cNvPr id="22" name="Shape 14"/>
+              <a:t>   Estimates effort and phases</a:t>
+            </a:r>
+            <a:endParaRPr lang="en-US" sz="1150" dirty="0"/>
+          </a:p>
+        </p:txBody>
+      </p:sp>
+      <p:sp>
+        <p:nvSpPr>
+          <p:cNvPr id="83" name="Shape 40">
+            <a:extLst>
+              <a:ext uri="{FF2B5EF4-FFF2-40B4-BE49-F238E27FC236}">
+                <a16:creationId xmlns:a16="http://schemas.microsoft.com/office/drawing/2014/main" id="{F8D6C89E-49A0-8A4B-CAE4-05BDD3809395}"/>
+              </a:ext>
+            </a:extLst>
+          </p:cNvPr>
           <p:cNvSpPr/>
           <p:nvPr/>
         </p:nvSpPr>
         <p:spPr>
           <a:xfrm>
-            <a:off x="8970264" y="1920240"/>
-            <a:ext cx="2514600" cy="3017520"/>
-          </a:xfrm>
-          <a:prstGeom prst="rect">
-            <a:avLst/>
-          </a:prstGeom>
-          <a:solidFill>
-            <a:srgbClr val="0A1F3D"/>
-          </a:solidFill>
-          <a:ln w="12700">
+            <a:off x="3179369" y="5111496"/>
+            <a:ext cx="438912" cy="0"/>
+          </a:xfrm>
+          <a:prstGeom prst="line">
+            <a:avLst/>
+          </a:prstGeom>
+          <a:noFill/>
+          <a:ln w="22225">
             <a:solidFill>
-              <a:srgbClr val="0A1F3D"/>
+              <a:srgbClr val="E0A243"/>
             </a:solidFill>
             <a:prstDash val="solid"/>
+            <a:tailEnd type="triangle"/>
           </a:ln>
-          <a:effectLst>
-            <a:outerShdw blurRad="101600" dist="25400" dir="5400000" algn="bl" rotWithShape="0">
-              <a:srgbClr val="000000">
-                <a:alpha val="12000"/>
-              </a:srgbClr>
-            </a:outerShdw>
-          </a:effectLst>
-        </p:spPr>
-      </p:sp>
-      <p:sp>
-        <p:nvSpPr>
-          <p:cNvPr id="23" name="Text 15"/>
-          <p:cNvSpPr txBox="1"/>
-          <p:nvPr/>
-        </p:nvSpPr>
-        <p:spPr>
-          <a:xfrm>
-            <a:off x="9244584" y="2148840"/>
-            <a:ext cx="1097280" cy="502920"/>
-          </a:xfrm>
-          <a:prstGeom prst="rect">
-            <a:avLst/>
-          </a:prstGeom>
-          <a:noFill/>
-          <a:ln/>
-        </p:spPr>
-        <p:txBody>
-          <a:bodyPr wrap="square" lIns="0" tIns="0" rIns="0" bIns="0" rtlCol="0" anchor="ctr"/>
-          <a:lstStyle/>
-          <a:p>
-            <a:pPr marL="0" indent="0">
-              <a:buNone/>
-            </a:pPr>
-            <a:r>
-              <a:rPr lang="en-US" sz="3000" b="1" dirty="0">
-                <a:solidFill>
-                  <a:srgbClr val="E0A243"/>
-                </a:solidFill>
-                <a:latin typeface="Cambria" pitchFamily="34" charset="0"/>
-                <a:ea typeface="Cambria" pitchFamily="34" charset="-122"/>
-                <a:cs typeface="Cambria" pitchFamily="34" charset="-120"/>
-              </a:rPr>
-              <a:t>04</a:t>
-            </a:r>
-            <a:endParaRPr lang="en-US" sz="3000" dirty="0"/>
-          </a:p>
-        </p:txBody>
-      </p:sp>
-      <p:pic>
-        <p:nvPicPr>
-          <p:cNvPr id="24" name="Image 6" descr="preencoded.png"/>
-          <p:cNvPicPr>
-            <a:picLocks noChangeAspect="1"/>
-          </p:cNvPicPr>
-          <p:nvPr/>
-        </p:nvPicPr>
-        <p:blipFill>
-          <a:blip r:embed="rId7"/>
-          <a:stretch>
-            <a:fillRect/>
-          </a:stretch>
-        </p:blipFill>
-        <p:spPr>
-          <a:xfrm>
-            <a:off x="10799064" y="2194560"/>
-            <a:ext cx="411480" cy="411480"/>
-          </a:xfrm>
-          <a:prstGeom prst="rect">
-            <a:avLst/>
-          </a:prstGeom>
-        </p:spPr>
-      </p:pic>
-      <p:sp>
-        <p:nvSpPr>
-          <p:cNvPr id="25" name="Text 16"/>
-          <p:cNvSpPr txBox="1"/>
-          <p:nvPr/>
-        </p:nvSpPr>
-        <p:spPr>
-          <a:xfrm>
-            <a:off x="9244584" y="2834640"/>
-            <a:ext cx="2011680" cy="411480"/>
-          </a:xfrm>
-          <a:prstGeom prst="rect">
-            <a:avLst/>
-          </a:prstGeom>
-          <a:noFill/>
-          <a:ln/>
-        </p:spPr>
-        <p:txBody>
-          <a:bodyPr wrap="square" lIns="0" tIns="0" rIns="0" bIns="0" rtlCol="0" anchor="ctr"/>
-          <a:lstStyle/>
-          <a:p>
-            <a:pPr marL="0" indent="0">
-              <a:buNone/>
-            </a:pPr>
-            <a:r>
-              <a:rPr lang="en-US" sz="2100" b="1" dirty="0">
-                <a:solidFill>
-                  <a:srgbClr val="FFFFFF"/>
-                </a:solidFill>
-                <a:latin typeface="Cambria" pitchFamily="34" charset="0"/>
-                <a:ea typeface="Cambria" pitchFamily="34" charset="-122"/>
-                <a:cs typeface="Cambria" pitchFamily="34" charset="-120"/>
-              </a:rPr>
-              <a:t>Blueprint</a:t>
-            </a:r>
-            <a:endParaRPr lang="en-US" sz="2100" dirty="0"/>
-          </a:p>
-        </p:txBody>
-      </p:sp>
-      <p:sp>
-        <p:nvSpPr>
-          <p:cNvPr id="26" name="Text 17"/>
-          <p:cNvSpPr txBox="1"/>
-          <p:nvPr/>
-        </p:nvSpPr>
-        <p:spPr>
-          <a:xfrm>
-            <a:off x="9244584" y="3291840"/>
-            <a:ext cx="2011680" cy="1508760"/>
-          </a:xfrm>
-          <a:prstGeom prst="rect">
-            <a:avLst/>
-          </a:prstGeom>
-          <a:noFill/>
-          <a:ln/>
-        </p:spPr>
-        <p:txBody>
-          <a:bodyPr wrap="square" lIns="0" tIns="0" rIns="0" bIns="0" rtlCol="0" anchor="t"/>
-          <a:lstStyle/>
-          <a:p>
-            <a:pPr marL="0" indent="0">
-              <a:buNone/>
-            </a:pPr>
-            <a:r>
-              <a:rPr lang="en-US" sz="1400" dirty="0">
-                <a:solidFill>
-                  <a:srgbClr val="B9C7DD"/>
-                </a:solidFill>
-                <a:latin typeface="Calibri" pitchFamily="34" charset="0"/>
-                <a:ea typeface="Calibri" pitchFamily="34" charset="-122"/>
-                <a:cs typeface="Calibri" pitchFamily="34" charset="-120"/>
-              </a:rPr>
-              <a:t>Six linked deliverables in one hub, ready to export to PDF, Word or JSON.</a:t>
-            </a:r>
-            <a:endParaRPr lang="en-US" sz="1400" dirty="0"/>
-          </a:p>
-        </p:txBody>
-      </p:sp>
-      <p:sp>
-        <p:nvSpPr>
-          <p:cNvPr id="27" name="Shape 18"/>
+        </p:spPr>
+      </p:sp>
+      <p:sp>
+        <p:nvSpPr>
+          <p:cNvPr id="85" name="Shape 41">
+            <a:extLst>
+              <a:ext uri="{FF2B5EF4-FFF2-40B4-BE49-F238E27FC236}">
+                <a16:creationId xmlns:a16="http://schemas.microsoft.com/office/drawing/2014/main" id="{DBD3E746-4380-E698-CF03-99034BE9FC0E}"/>
+              </a:ext>
+            </a:extLst>
+          </p:cNvPr>
           <p:cNvSpPr/>
           <p:nvPr/>
         </p:nvSpPr>
         <p:spPr>
           <a:xfrm>
-            <a:off x="548640" y="5349240"/>
-            <a:ext cx="3520440" cy="594360"/>
+            <a:off x="7422185" y="3931920"/>
+            <a:ext cx="1911096" cy="384048"/>
           </a:xfrm>
           <a:prstGeom prst="roundRect">
             <a:avLst>
-              <a:gd name="adj" fmla="val 49231"/>
+              <a:gd name="adj" fmla="val 50000"/>
             </a:avLst>
           </a:prstGeom>
           <a:solidFill>
@@ -5500,30 +6247,38 @@
       </p:sp>
       <p:sp>
         <p:nvSpPr>
-          <p:cNvPr id="28" name="Text 19"/>
-          <p:cNvSpPr txBox="1"/>
-          <p:nvPr/>
-        </p:nvSpPr>
-        <p:spPr>
-          <a:xfrm>
-            <a:off x="548640" y="5349240"/>
-            <a:ext cx="3520440" cy="594360"/>
-          </a:xfrm>
-          <a:prstGeom prst="rect">
-            <a:avLst/>
-          </a:prstGeom>
-          <a:noFill/>
-          <a:ln/>
-        </p:spPr>
-        <p:txBody>
-          <a:bodyPr wrap="square" lIns="0" tIns="0" rIns="0" bIns="0" rtlCol="0" anchor="ctr"/>
+          <p:cNvPr id="87" name="Text 42">
+            <a:extLst>
+              <a:ext uri="{FF2B5EF4-FFF2-40B4-BE49-F238E27FC236}">
+                <a16:creationId xmlns:a16="http://schemas.microsoft.com/office/drawing/2014/main" id="{6D88840D-1E1A-5D0E-1C9D-D429A79B9ED0}"/>
+              </a:ext>
+            </a:extLst>
+          </p:cNvPr>
+          <p:cNvSpPr txBox="1"/>
+          <p:nvPr/>
+        </p:nvSpPr>
+        <p:spPr>
+          <a:xfrm>
+            <a:off x="7513625" y="3931920"/>
+            <a:ext cx="1728216" cy="384048"/>
+          </a:xfrm>
+          <a:prstGeom prst="rect">
+            <a:avLst/>
+          </a:prstGeom>
+          <a:noFill/>
+          <a:ln/>
+        </p:spPr>
+        <p:txBody>
+          <a:bodyPr wrap="square" lIns="0" tIns="0" rIns="0" bIns="0" rtlCol="0" anchor="ctr">
+            <a:normAutofit/>
+          </a:bodyPr>
           <a:lstStyle/>
           <a:p>
             <a:pPr marL="0" indent="0" algn="ctr">
               <a:buNone/>
             </a:pPr>
             <a:r>
-              <a:rPr lang="en-US" sz="1500" b="1" dirty="0">
+              <a:rPr lang="en-US" sz="1050" b="1" dirty="0">
                 <a:solidFill>
                   <a:srgbClr val="0A1F3D"/>
                 </a:solidFill>
@@ -5531,26 +6286,32 @@
                 <a:ea typeface="Calibri" pitchFamily="34" charset="-122"/>
                 <a:cs typeface="Calibri" pitchFamily="34" charset="-120"/>
               </a:rPr>
-              <a:t>Consults, not just summarizes</a:t>
-            </a:r>
-            <a:endParaRPr lang="en-US" sz="1500" dirty="0"/>
-          </a:p>
-        </p:txBody>
-      </p:sp>
-      <p:sp>
-        <p:nvSpPr>
-          <p:cNvPr id="29" name="Shape 20"/>
+              <a:t>Executive BRD</a:t>
+            </a:r>
+            <a:endParaRPr lang="en-US" sz="1050" dirty="0"/>
+          </a:p>
+        </p:txBody>
+      </p:sp>
+      <p:sp>
+        <p:nvSpPr>
+          <p:cNvPr id="89" name="Shape 43">
+            <a:extLst>
+              <a:ext uri="{FF2B5EF4-FFF2-40B4-BE49-F238E27FC236}">
+                <a16:creationId xmlns:a16="http://schemas.microsoft.com/office/drawing/2014/main" id="{EBBAE173-4C50-2C9A-49B2-C1F19987A040}"/>
+              </a:ext>
+            </a:extLst>
+          </p:cNvPr>
           <p:cNvSpPr/>
           <p:nvPr/>
         </p:nvSpPr>
         <p:spPr>
           <a:xfrm>
-            <a:off x="4297680" y="5349240"/>
-            <a:ext cx="3520440" cy="594360"/>
+            <a:off x="9443009" y="3931920"/>
+            <a:ext cx="1911096" cy="384048"/>
           </a:xfrm>
           <a:prstGeom prst="roundRect">
             <a:avLst>
-              <a:gd name="adj" fmla="val 49231"/>
+              <a:gd name="adj" fmla="val 50000"/>
             </a:avLst>
           </a:prstGeom>
           <a:solidFill>
@@ -5566,30 +6327,38 @@
       </p:sp>
       <p:sp>
         <p:nvSpPr>
-          <p:cNvPr id="30" name="Text 21"/>
-          <p:cNvSpPr txBox="1"/>
-          <p:nvPr/>
-        </p:nvSpPr>
-        <p:spPr>
-          <a:xfrm>
-            <a:off x="4297680" y="5349240"/>
-            <a:ext cx="3520440" cy="594360"/>
-          </a:xfrm>
-          <a:prstGeom prst="rect">
-            <a:avLst/>
-          </a:prstGeom>
-          <a:noFill/>
-          <a:ln/>
-        </p:spPr>
-        <p:txBody>
-          <a:bodyPr wrap="square" lIns="0" tIns="0" rIns="0" bIns="0" rtlCol="0" anchor="ctr"/>
+          <p:cNvPr id="91" name="Text 44">
+            <a:extLst>
+              <a:ext uri="{FF2B5EF4-FFF2-40B4-BE49-F238E27FC236}">
+                <a16:creationId xmlns:a16="http://schemas.microsoft.com/office/drawing/2014/main" id="{02E81A4D-6350-A2A9-8DE9-7F0DABD406AA}"/>
+              </a:ext>
+            </a:extLst>
+          </p:cNvPr>
+          <p:cNvSpPr txBox="1"/>
+          <p:nvPr/>
+        </p:nvSpPr>
+        <p:spPr>
+          <a:xfrm>
+            <a:off x="9534449" y="3931920"/>
+            <a:ext cx="1728216" cy="384048"/>
+          </a:xfrm>
+          <a:prstGeom prst="rect">
+            <a:avLst/>
+          </a:prstGeom>
+          <a:noFill/>
+          <a:ln/>
+        </p:spPr>
+        <p:txBody>
+          <a:bodyPr wrap="square" lIns="0" tIns="0" rIns="0" bIns="0" rtlCol="0" anchor="ctr">
+            <a:normAutofit/>
+          </a:bodyPr>
           <a:lstStyle/>
           <a:p>
             <a:pPr marL="0" indent="0" algn="ctr">
               <a:buNone/>
             </a:pPr>
             <a:r>
-              <a:rPr lang="en-US" sz="1500" b="1" dirty="0">
+              <a:rPr lang="en-US" sz="1050" b="1" dirty="0">
                 <a:solidFill>
                   <a:srgbClr val="0A1F3D"/>
                 </a:solidFill>
@@ -5597,26 +6366,32 @@
                 <a:ea typeface="Calibri" pitchFamily="34" charset="-122"/>
                 <a:cs typeface="Calibri" pitchFamily="34" charset="-120"/>
               </a:rPr>
-              <a:t>One shared source of truth</a:t>
-            </a:r>
-            <a:endParaRPr lang="en-US" sz="1500" dirty="0"/>
-          </a:p>
-        </p:txBody>
-      </p:sp>
-      <p:sp>
-        <p:nvSpPr>
-          <p:cNvPr id="31" name="Shape 22"/>
+              <a:t>Solution architecture</a:t>
+            </a:r>
+            <a:endParaRPr lang="en-US" sz="1050" dirty="0"/>
+          </a:p>
+        </p:txBody>
+      </p:sp>
+      <p:sp>
+        <p:nvSpPr>
+          <p:cNvPr id="93" name="Shape 45">
+            <a:extLst>
+              <a:ext uri="{FF2B5EF4-FFF2-40B4-BE49-F238E27FC236}">
+                <a16:creationId xmlns:a16="http://schemas.microsoft.com/office/drawing/2014/main" id="{E6D1CBCA-B342-50A5-8D2D-007580A6B794}"/>
+              </a:ext>
+            </a:extLst>
+          </p:cNvPr>
           <p:cNvSpPr/>
           <p:nvPr/>
         </p:nvSpPr>
         <p:spPr>
           <a:xfrm>
-            <a:off x="8046720" y="5349240"/>
-            <a:ext cx="3520440" cy="594360"/>
+            <a:off x="7422185" y="4425696"/>
+            <a:ext cx="1911096" cy="384048"/>
           </a:xfrm>
           <a:prstGeom prst="roundRect">
             <a:avLst>
-              <a:gd name="adj" fmla="val 49231"/>
+              <a:gd name="adj" fmla="val 50000"/>
             </a:avLst>
           </a:prstGeom>
           <a:solidFill>
@@ -5632,14 +6407,337 @@
       </p:sp>
       <p:sp>
         <p:nvSpPr>
-          <p:cNvPr id="32" name="Text 23"/>
-          <p:cNvSpPr txBox="1"/>
-          <p:nvPr/>
-        </p:nvSpPr>
-        <p:spPr>
-          <a:xfrm>
-            <a:off x="8046720" y="5349240"/>
-            <a:ext cx="3520440" cy="594360"/>
+          <p:cNvPr id="95" name="Text 46">
+            <a:extLst>
+              <a:ext uri="{FF2B5EF4-FFF2-40B4-BE49-F238E27FC236}">
+                <a16:creationId xmlns:a16="http://schemas.microsoft.com/office/drawing/2014/main" id="{9BB76F49-31EF-E38B-D90E-FEC43134D28A}"/>
+              </a:ext>
+            </a:extLst>
+          </p:cNvPr>
+          <p:cNvSpPr txBox="1"/>
+          <p:nvPr/>
+        </p:nvSpPr>
+        <p:spPr>
+          <a:xfrm>
+            <a:off x="7513625" y="4425696"/>
+            <a:ext cx="1728216" cy="384048"/>
+          </a:xfrm>
+          <a:prstGeom prst="rect">
+            <a:avLst/>
+          </a:prstGeom>
+          <a:noFill/>
+          <a:ln/>
+        </p:spPr>
+        <p:txBody>
+          <a:bodyPr wrap="square" lIns="0" tIns="0" rIns="0" bIns="0" rtlCol="0" anchor="ctr">
+            <a:normAutofit/>
+          </a:bodyPr>
+          <a:lstStyle/>
+          <a:p>
+            <a:pPr marL="0" indent="0" algn="ctr">
+              <a:buNone/>
+            </a:pPr>
+            <a:r>
+              <a:rPr lang="en-US" sz="1050" b="1" dirty="0">
+                <a:solidFill>
+                  <a:srgbClr val="0A1F3D"/>
+                </a:solidFill>
+                <a:latin typeface="Calibri" pitchFamily="34" charset="0"/>
+                <a:ea typeface="Calibri" pitchFamily="34" charset="-122"/>
+                <a:cs typeface="Calibri" pitchFamily="34" charset="-120"/>
+              </a:rPr>
+              <a:t>Process flow (BPMN)</a:t>
+            </a:r>
+            <a:endParaRPr lang="en-US" sz="1050" dirty="0"/>
+          </a:p>
+        </p:txBody>
+      </p:sp>
+      <p:sp>
+        <p:nvSpPr>
+          <p:cNvPr id="97" name="Shape 47">
+            <a:extLst>
+              <a:ext uri="{FF2B5EF4-FFF2-40B4-BE49-F238E27FC236}">
+                <a16:creationId xmlns:a16="http://schemas.microsoft.com/office/drawing/2014/main" id="{183379C8-0E5F-8BF8-9C6D-9A3BE65607D4}"/>
+              </a:ext>
+            </a:extLst>
+          </p:cNvPr>
+          <p:cNvSpPr/>
+          <p:nvPr/>
+        </p:nvSpPr>
+        <p:spPr>
+          <a:xfrm>
+            <a:off x="9443009" y="4425696"/>
+            <a:ext cx="1911096" cy="384048"/>
+          </a:xfrm>
+          <a:prstGeom prst="roundRect">
+            <a:avLst>
+              <a:gd name="adj" fmla="val 50000"/>
+            </a:avLst>
+          </a:prstGeom>
+          <a:solidFill>
+            <a:srgbClr val="FBF1DE"/>
+          </a:solidFill>
+          <a:ln w="12700">
+            <a:solidFill>
+              <a:srgbClr val="E0A243"/>
+            </a:solidFill>
+            <a:prstDash val="solid"/>
+          </a:ln>
+        </p:spPr>
+      </p:sp>
+      <p:sp>
+        <p:nvSpPr>
+          <p:cNvPr id="99" name="Text 48">
+            <a:extLst>
+              <a:ext uri="{FF2B5EF4-FFF2-40B4-BE49-F238E27FC236}">
+                <a16:creationId xmlns:a16="http://schemas.microsoft.com/office/drawing/2014/main" id="{FE4F49FA-2597-577F-8392-7A4168A8942D}"/>
+              </a:ext>
+            </a:extLst>
+          </p:cNvPr>
+          <p:cNvSpPr txBox="1"/>
+          <p:nvPr/>
+        </p:nvSpPr>
+        <p:spPr>
+          <a:xfrm>
+            <a:off x="9534449" y="4425696"/>
+            <a:ext cx="1728216" cy="384048"/>
+          </a:xfrm>
+          <a:prstGeom prst="rect">
+            <a:avLst/>
+          </a:prstGeom>
+          <a:noFill/>
+          <a:ln/>
+        </p:spPr>
+        <p:txBody>
+          <a:bodyPr wrap="square" lIns="0" tIns="0" rIns="0" bIns="0" rtlCol="0" anchor="ctr">
+            <a:normAutofit/>
+          </a:bodyPr>
+          <a:lstStyle/>
+          <a:p>
+            <a:pPr marL="0" indent="0" algn="ctr">
+              <a:buNone/>
+            </a:pPr>
+            <a:r>
+              <a:rPr lang="en-US" sz="1050" b="1" dirty="0">
+                <a:solidFill>
+                  <a:srgbClr val="0A1F3D"/>
+                </a:solidFill>
+                <a:latin typeface="Calibri" pitchFamily="34" charset="0"/>
+                <a:ea typeface="Calibri" pitchFamily="34" charset="-122"/>
+                <a:cs typeface="Calibri" pitchFamily="34" charset="-120"/>
+              </a:rPr>
+              <a:t>Database &amp; REST APIs</a:t>
+            </a:r>
+            <a:endParaRPr lang="en-US" sz="1050" dirty="0"/>
+          </a:p>
+        </p:txBody>
+      </p:sp>
+      <p:sp>
+        <p:nvSpPr>
+          <p:cNvPr id="101" name="Shape 49">
+            <a:extLst>
+              <a:ext uri="{FF2B5EF4-FFF2-40B4-BE49-F238E27FC236}">
+                <a16:creationId xmlns:a16="http://schemas.microsoft.com/office/drawing/2014/main" id="{779837F8-FD15-0735-5CDC-F6E3D81FB797}"/>
+              </a:ext>
+            </a:extLst>
+          </p:cNvPr>
+          <p:cNvSpPr/>
+          <p:nvPr/>
+        </p:nvSpPr>
+        <p:spPr>
+          <a:xfrm>
+            <a:off x="7422185" y="4919472"/>
+            <a:ext cx="1911096" cy="384048"/>
+          </a:xfrm>
+          <a:prstGeom prst="roundRect">
+            <a:avLst>
+              <a:gd name="adj" fmla="val 50000"/>
+            </a:avLst>
+          </a:prstGeom>
+          <a:solidFill>
+            <a:srgbClr val="FBF1DE"/>
+          </a:solidFill>
+          <a:ln w="12700">
+            <a:solidFill>
+              <a:srgbClr val="E0A243"/>
+            </a:solidFill>
+            <a:prstDash val="solid"/>
+          </a:ln>
+        </p:spPr>
+      </p:sp>
+      <p:sp>
+        <p:nvSpPr>
+          <p:cNvPr id="103" name="Text 50">
+            <a:extLst>
+              <a:ext uri="{FF2B5EF4-FFF2-40B4-BE49-F238E27FC236}">
+                <a16:creationId xmlns:a16="http://schemas.microsoft.com/office/drawing/2014/main" id="{2DA80A22-F57C-E980-737B-CD3A02D6452F}"/>
+              </a:ext>
+            </a:extLst>
+          </p:cNvPr>
+          <p:cNvSpPr txBox="1"/>
+          <p:nvPr/>
+        </p:nvSpPr>
+        <p:spPr>
+          <a:xfrm>
+            <a:off x="7513625" y="4919472"/>
+            <a:ext cx="1728216" cy="384048"/>
+          </a:xfrm>
+          <a:prstGeom prst="rect">
+            <a:avLst/>
+          </a:prstGeom>
+          <a:noFill/>
+          <a:ln/>
+        </p:spPr>
+        <p:txBody>
+          <a:bodyPr wrap="square" lIns="0" tIns="0" rIns="0" bIns="0" rtlCol="0" anchor="ctr">
+            <a:normAutofit/>
+          </a:bodyPr>
+          <a:lstStyle/>
+          <a:p>
+            <a:pPr marL="0" indent="0" algn="ctr">
+              <a:buNone/>
+            </a:pPr>
+            <a:r>
+              <a:rPr lang="en-US" sz="1050" b="1" dirty="0">
+                <a:solidFill>
+                  <a:srgbClr val="0A1F3D"/>
+                </a:solidFill>
+                <a:latin typeface="Calibri" pitchFamily="34" charset="0"/>
+                <a:ea typeface="Calibri" pitchFamily="34" charset="-122"/>
+                <a:cs typeface="Calibri" pitchFamily="34" charset="-120"/>
+              </a:rPr>
+              <a:t>UX wireframes</a:t>
+            </a:r>
+            <a:endParaRPr lang="en-US" sz="1050" dirty="0"/>
+          </a:p>
+        </p:txBody>
+      </p:sp>
+      <p:sp>
+        <p:nvSpPr>
+          <p:cNvPr id="105" name="Shape 51">
+            <a:extLst>
+              <a:ext uri="{FF2B5EF4-FFF2-40B4-BE49-F238E27FC236}">
+                <a16:creationId xmlns:a16="http://schemas.microsoft.com/office/drawing/2014/main" id="{8064FF77-01A0-119A-3BCB-6C6AE187B587}"/>
+              </a:ext>
+            </a:extLst>
+          </p:cNvPr>
+          <p:cNvSpPr/>
+          <p:nvPr/>
+        </p:nvSpPr>
+        <p:spPr>
+          <a:xfrm>
+            <a:off x="9443009" y="4919472"/>
+            <a:ext cx="1911096" cy="384048"/>
+          </a:xfrm>
+          <a:prstGeom prst="roundRect">
+            <a:avLst>
+              <a:gd name="adj" fmla="val 50000"/>
+            </a:avLst>
+          </a:prstGeom>
+          <a:solidFill>
+            <a:srgbClr val="FBF1DE"/>
+          </a:solidFill>
+          <a:ln w="12700">
+            <a:solidFill>
+              <a:srgbClr val="E0A243"/>
+            </a:solidFill>
+            <a:prstDash val="solid"/>
+          </a:ln>
+        </p:spPr>
+      </p:sp>
+      <p:sp>
+        <p:nvSpPr>
+          <p:cNvPr id="107" name="Text 52">
+            <a:extLst>
+              <a:ext uri="{FF2B5EF4-FFF2-40B4-BE49-F238E27FC236}">
+                <a16:creationId xmlns:a16="http://schemas.microsoft.com/office/drawing/2014/main" id="{886AF1C6-D34C-BAA0-A857-8CA3B7F07561}"/>
+              </a:ext>
+            </a:extLst>
+          </p:cNvPr>
+          <p:cNvSpPr txBox="1"/>
+          <p:nvPr/>
+        </p:nvSpPr>
+        <p:spPr>
+          <a:xfrm>
+            <a:off x="9534449" y="4919472"/>
+            <a:ext cx="1728216" cy="384048"/>
+          </a:xfrm>
+          <a:prstGeom prst="rect">
+            <a:avLst/>
+          </a:prstGeom>
+          <a:noFill/>
+          <a:ln/>
+        </p:spPr>
+        <p:txBody>
+          <a:bodyPr wrap="square" lIns="0" tIns="0" rIns="0" bIns="0" rtlCol="0" anchor="ctr">
+            <a:normAutofit/>
+          </a:bodyPr>
+          <a:lstStyle/>
+          <a:p>
+            <a:pPr marL="0" indent="0" algn="ctr">
+              <a:buNone/>
+            </a:pPr>
+            <a:r>
+              <a:rPr lang="en-US" sz="1050" b="1" dirty="0">
+                <a:solidFill>
+                  <a:srgbClr val="0A1F3D"/>
+                </a:solidFill>
+                <a:latin typeface="Calibri" pitchFamily="34" charset="0"/>
+                <a:ea typeface="Calibri" pitchFamily="34" charset="-122"/>
+                <a:cs typeface="Calibri" pitchFamily="34" charset="-120"/>
+              </a:rPr>
+              <a:t>Effort &amp; cost band</a:t>
+            </a:r>
+            <a:endParaRPr lang="en-US" sz="1050" dirty="0"/>
+          </a:p>
+        </p:txBody>
+      </p:sp>
+      <p:sp>
+        <p:nvSpPr>
+          <p:cNvPr id="109" name="Shape 53">
+            <a:extLst>
+              <a:ext uri="{FF2B5EF4-FFF2-40B4-BE49-F238E27FC236}">
+                <a16:creationId xmlns:a16="http://schemas.microsoft.com/office/drawing/2014/main" id="{2646A47D-00F6-C4C1-345B-17D32E745E16}"/>
+              </a:ext>
+            </a:extLst>
+          </p:cNvPr>
+          <p:cNvSpPr/>
+          <p:nvPr/>
+        </p:nvSpPr>
+        <p:spPr>
+          <a:xfrm>
+            <a:off x="6928409" y="4617720"/>
+            <a:ext cx="438912" cy="0"/>
+          </a:xfrm>
+          <a:prstGeom prst="line">
+            <a:avLst/>
+          </a:prstGeom>
+          <a:noFill/>
+          <a:ln w="22225">
+            <a:solidFill>
+              <a:srgbClr val="E0A243"/>
+            </a:solidFill>
+            <a:prstDash val="solid"/>
+            <a:tailEnd type="triangle"/>
+          </a:ln>
+        </p:spPr>
+      </p:sp>
+      <p:sp>
+        <p:nvSpPr>
+          <p:cNvPr id="111" name="Text 54">
+            <a:extLst>
+              <a:ext uri="{FF2B5EF4-FFF2-40B4-BE49-F238E27FC236}">
+                <a16:creationId xmlns:a16="http://schemas.microsoft.com/office/drawing/2014/main" id="{A28C8582-096C-B72D-59DE-CE9F522D62C3}"/>
+              </a:ext>
+            </a:extLst>
+          </p:cNvPr>
+          <p:cNvSpPr txBox="1"/>
+          <p:nvPr/>
+        </p:nvSpPr>
+        <p:spPr>
+          <a:xfrm>
+            <a:off x="609905" y="5760720"/>
+            <a:ext cx="1371600" cy="365760"/>
           </a:xfrm>
           <a:prstGeom prst="rect">
             <a:avLst/>
@@ -5651,11 +6749,89 @@
           <a:bodyPr wrap="square" lIns="0" tIns="0" rIns="0" bIns="0" rtlCol="0" anchor="ctr"/>
           <a:lstStyle/>
           <a:p>
+            <a:pPr marL="0" indent="0">
+              <a:buNone/>
+            </a:pPr>
+            <a:r>
+              <a:rPr lang="en-US" sz="1000" b="1" kern="0" spc="200" dirty="0">
+                <a:solidFill>
+                  <a:srgbClr val="5B6B82"/>
+                </a:solidFill>
+                <a:latin typeface="Calibri" pitchFamily="34" charset="0"/>
+                <a:ea typeface="Calibri" pitchFamily="34" charset="-122"/>
+                <a:cs typeface="Calibri" pitchFamily="34" charset="-120"/>
+              </a:rPr>
+              <a:t>AI RESILIENCE</a:t>
+            </a:r>
+            <a:endParaRPr lang="en-US" sz="1000" dirty="0"/>
+          </a:p>
+        </p:txBody>
+      </p:sp>
+      <p:sp>
+        <p:nvSpPr>
+          <p:cNvPr id="113" name="Shape 55">
+            <a:extLst>
+              <a:ext uri="{FF2B5EF4-FFF2-40B4-BE49-F238E27FC236}">
+                <a16:creationId xmlns:a16="http://schemas.microsoft.com/office/drawing/2014/main" id="{115F460D-CF71-8EF8-0340-9BC21E3A22D7}"/>
+              </a:ext>
+            </a:extLst>
+          </p:cNvPr>
+          <p:cNvSpPr/>
+          <p:nvPr/>
+        </p:nvSpPr>
+        <p:spPr>
+          <a:xfrm>
+            <a:off x="2027225" y="5760720"/>
+            <a:ext cx="1737360" cy="365760"/>
+          </a:xfrm>
+          <a:prstGeom prst="roundRect">
+            <a:avLst>
+              <a:gd name="adj" fmla="val 50000"/>
+            </a:avLst>
+          </a:prstGeom>
+          <a:solidFill>
+            <a:srgbClr val="FFFFFF"/>
+          </a:solidFill>
+          <a:ln w="12700">
+            <a:solidFill>
+              <a:srgbClr val="0A1F3D"/>
+            </a:solidFill>
+            <a:prstDash val="solid"/>
+          </a:ln>
+        </p:spPr>
+      </p:sp>
+      <p:sp>
+        <p:nvSpPr>
+          <p:cNvPr id="115" name="Text 56">
+            <a:extLst>
+              <a:ext uri="{FF2B5EF4-FFF2-40B4-BE49-F238E27FC236}">
+                <a16:creationId xmlns:a16="http://schemas.microsoft.com/office/drawing/2014/main" id="{822FDB40-7E16-BAA5-CF3B-C7D5F4388175}"/>
+              </a:ext>
+            </a:extLst>
+          </p:cNvPr>
+          <p:cNvSpPr txBox="1"/>
+          <p:nvPr/>
+        </p:nvSpPr>
+        <p:spPr>
+          <a:xfrm>
+            <a:off x="2027225" y="5760720"/>
+            <a:ext cx="1737360" cy="365760"/>
+          </a:xfrm>
+          <a:prstGeom prst="rect">
+            <a:avLst/>
+          </a:prstGeom>
+          <a:noFill/>
+          <a:ln/>
+        </p:spPr>
+        <p:txBody>
+          <a:bodyPr wrap="square" lIns="0" tIns="0" rIns="0" bIns="0" rtlCol="0" anchor="ctr"/>
+          <a:lstStyle/>
+          <a:p>
             <a:pPr marL="0" indent="0" algn="ctr">
               <a:buNone/>
             </a:pPr>
             <a:r>
-              <a:rPr lang="en-US" sz="1500" b="1" dirty="0">
+              <a:rPr lang="en-US" sz="1100" b="1" dirty="0">
                 <a:solidFill>
                   <a:srgbClr val="0A1F3D"/>
                 </a:solidFill>
@@ -5663,22 +6839,91 @@
                 <a:ea typeface="Calibri" pitchFamily="34" charset="-122"/>
                 <a:cs typeface="Calibri" pitchFamily="34" charset="-120"/>
               </a:rPr>
-              <a:t>Implementation-ready output</a:t>
-            </a:r>
-            <a:endParaRPr lang="en-US" sz="1500" dirty="0"/>
-          </a:p>
-        </p:txBody>
-      </p:sp>
-      <p:sp>
-        <p:nvSpPr>
-          <p:cNvPr id="33" name="Text 24"/>
-          <p:cNvSpPr txBox="1"/>
-          <p:nvPr/>
-        </p:nvSpPr>
-        <p:spPr>
-          <a:xfrm>
-            <a:off x="548640" y="6400800"/>
-            <a:ext cx="5486400" cy="274320"/>
+              <a:t>Primary model</a:t>
+            </a:r>
+            <a:endParaRPr lang="en-US" sz="1100" dirty="0"/>
+          </a:p>
+        </p:txBody>
+      </p:sp>
+      <p:sp>
+        <p:nvSpPr>
+          <p:cNvPr id="117" name="Shape 57">
+            <a:extLst>
+              <a:ext uri="{FF2B5EF4-FFF2-40B4-BE49-F238E27FC236}">
+                <a16:creationId xmlns:a16="http://schemas.microsoft.com/office/drawing/2014/main" id="{522A481C-3A62-882C-CC97-9BC4C43571CA}"/>
+              </a:ext>
+            </a:extLst>
+          </p:cNvPr>
+          <p:cNvSpPr/>
+          <p:nvPr/>
+        </p:nvSpPr>
+        <p:spPr>
+          <a:xfrm>
+            <a:off x="3810305" y="5943600"/>
+            <a:ext cx="320040" cy="0"/>
+          </a:xfrm>
+          <a:prstGeom prst="line">
+            <a:avLst/>
+          </a:prstGeom>
+          <a:noFill/>
+          <a:ln w="22225">
+            <a:solidFill>
+              <a:srgbClr val="E0A243"/>
+            </a:solidFill>
+            <a:prstDash val="solid"/>
+            <a:tailEnd type="triangle"/>
+          </a:ln>
+        </p:spPr>
+      </p:sp>
+      <p:sp>
+        <p:nvSpPr>
+          <p:cNvPr id="119" name="Shape 58">
+            <a:extLst>
+              <a:ext uri="{FF2B5EF4-FFF2-40B4-BE49-F238E27FC236}">
+                <a16:creationId xmlns:a16="http://schemas.microsoft.com/office/drawing/2014/main" id="{F1CFDFA2-F854-A2B2-4042-97A0B6B862C8}"/>
+              </a:ext>
+            </a:extLst>
+          </p:cNvPr>
+          <p:cNvSpPr/>
+          <p:nvPr/>
+        </p:nvSpPr>
+        <p:spPr>
+          <a:xfrm>
+            <a:off x="4176065" y="5760720"/>
+            <a:ext cx="1737360" cy="365760"/>
+          </a:xfrm>
+          <a:prstGeom prst="roundRect">
+            <a:avLst>
+              <a:gd name="adj" fmla="val 50000"/>
+            </a:avLst>
+          </a:prstGeom>
+          <a:solidFill>
+            <a:srgbClr val="FFFFFF"/>
+          </a:solidFill>
+          <a:ln w="12700">
+            <a:solidFill>
+              <a:srgbClr val="0A1F3D"/>
+            </a:solidFill>
+            <a:prstDash val="solid"/>
+          </a:ln>
+        </p:spPr>
+      </p:sp>
+      <p:sp>
+        <p:nvSpPr>
+          <p:cNvPr id="121" name="Text 59">
+            <a:extLst>
+              <a:ext uri="{FF2B5EF4-FFF2-40B4-BE49-F238E27FC236}">
+                <a16:creationId xmlns:a16="http://schemas.microsoft.com/office/drawing/2014/main" id="{86CFFD7C-B640-070D-9D64-5A2A8316F201}"/>
+              </a:ext>
+            </a:extLst>
+          </p:cNvPr>
+          <p:cNvSpPr txBox="1"/>
+          <p:nvPr/>
+        </p:nvSpPr>
+        <p:spPr>
+          <a:xfrm>
+            <a:off x="4176065" y="5760720"/>
+            <a:ext cx="1737360" cy="365760"/>
           </a:xfrm>
           <a:prstGeom prst="rect">
             <a:avLst/>
@@ -5690,11 +6935,164 @@
           <a:bodyPr wrap="square" lIns="0" tIns="0" rIns="0" bIns="0" rtlCol="0" anchor="ctr"/>
           <a:lstStyle/>
           <a:p>
+            <a:pPr marL="0" indent="0" algn="ctr">
+              <a:buNone/>
+            </a:pPr>
+            <a:r>
+              <a:rPr lang="en-US" sz="1100" b="1" dirty="0">
+                <a:solidFill>
+                  <a:srgbClr val="0A1F3D"/>
+                </a:solidFill>
+                <a:latin typeface="Calibri" pitchFamily="34" charset="0"/>
+                <a:ea typeface="Calibri" pitchFamily="34" charset="-122"/>
+                <a:cs typeface="Calibri" pitchFamily="34" charset="-120"/>
+              </a:rPr>
+              <a:t>Backup model</a:t>
+            </a:r>
+            <a:endParaRPr lang="en-US" sz="1100" dirty="0"/>
+          </a:p>
+        </p:txBody>
+      </p:sp>
+      <p:sp>
+        <p:nvSpPr>
+          <p:cNvPr id="123" name="Shape 60">
+            <a:extLst>
+              <a:ext uri="{FF2B5EF4-FFF2-40B4-BE49-F238E27FC236}">
+                <a16:creationId xmlns:a16="http://schemas.microsoft.com/office/drawing/2014/main" id="{80519B51-53A8-B588-10A4-7FB5B6F41D7B}"/>
+              </a:ext>
+            </a:extLst>
+          </p:cNvPr>
+          <p:cNvSpPr/>
+          <p:nvPr/>
+        </p:nvSpPr>
+        <p:spPr>
+          <a:xfrm>
+            <a:off x="5959145" y="5943600"/>
+            <a:ext cx="320040" cy="0"/>
+          </a:xfrm>
+          <a:prstGeom prst="line">
+            <a:avLst/>
+          </a:prstGeom>
+          <a:noFill/>
+          <a:ln w="22225">
+            <a:solidFill>
+              <a:srgbClr val="E0A243"/>
+            </a:solidFill>
+            <a:prstDash val="solid"/>
+            <a:tailEnd type="triangle"/>
+          </a:ln>
+        </p:spPr>
+      </p:sp>
+      <p:sp>
+        <p:nvSpPr>
+          <p:cNvPr id="125" name="Shape 61">
+            <a:extLst>
+              <a:ext uri="{FF2B5EF4-FFF2-40B4-BE49-F238E27FC236}">
+                <a16:creationId xmlns:a16="http://schemas.microsoft.com/office/drawing/2014/main" id="{D3C4954D-086C-BF5A-0EA2-0E3B295EB433}"/>
+              </a:ext>
+            </a:extLst>
+          </p:cNvPr>
+          <p:cNvSpPr/>
+          <p:nvPr/>
+        </p:nvSpPr>
+        <p:spPr>
+          <a:xfrm>
+            <a:off x="6324905" y="5760720"/>
+            <a:ext cx="1737360" cy="365760"/>
+          </a:xfrm>
+          <a:prstGeom prst="roundRect">
+            <a:avLst>
+              <a:gd name="adj" fmla="val 50000"/>
+            </a:avLst>
+          </a:prstGeom>
+          <a:solidFill>
+            <a:srgbClr val="FFFFFF"/>
+          </a:solidFill>
+          <a:ln w="12700">
+            <a:solidFill>
+              <a:srgbClr val="0A1F3D"/>
+            </a:solidFill>
+            <a:prstDash val="solid"/>
+          </a:ln>
+        </p:spPr>
+      </p:sp>
+      <p:sp>
+        <p:nvSpPr>
+          <p:cNvPr id="127" name="Text 62">
+            <a:extLst>
+              <a:ext uri="{FF2B5EF4-FFF2-40B4-BE49-F238E27FC236}">
+                <a16:creationId xmlns:a16="http://schemas.microsoft.com/office/drawing/2014/main" id="{F0A0EEEE-D04F-1DF8-0DA7-D7F560B02F92}"/>
+              </a:ext>
+            </a:extLst>
+          </p:cNvPr>
+          <p:cNvSpPr txBox="1"/>
+          <p:nvPr/>
+        </p:nvSpPr>
+        <p:spPr>
+          <a:xfrm>
+            <a:off x="6324905" y="5760720"/>
+            <a:ext cx="1737360" cy="365760"/>
+          </a:xfrm>
+          <a:prstGeom prst="rect">
+            <a:avLst/>
+          </a:prstGeom>
+          <a:noFill/>
+          <a:ln/>
+        </p:spPr>
+        <p:txBody>
+          <a:bodyPr wrap="square" lIns="0" tIns="0" rIns="0" bIns="0" rtlCol="0" anchor="ctr"/>
+          <a:lstStyle/>
+          <a:p>
+            <a:pPr marL="0" indent="0" algn="ctr">
+              <a:buNone/>
+            </a:pPr>
+            <a:r>
+              <a:rPr lang="en-US" sz="1100" b="1" dirty="0">
+                <a:solidFill>
+                  <a:srgbClr val="0A1F3D"/>
+                </a:solidFill>
+                <a:latin typeface="Calibri" pitchFamily="34" charset="0"/>
+                <a:ea typeface="Calibri" pitchFamily="34" charset="-122"/>
+                <a:cs typeface="Calibri" pitchFamily="34" charset="-120"/>
+              </a:rPr>
+              <a:t>Offline engine</a:t>
+            </a:r>
+            <a:endParaRPr lang="en-US" sz="1100" dirty="0"/>
+          </a:p>
+        </p:txBody>
+      </p:sp>
+      <p:sp>
+        <p:nvSpPr>
+          <p:cNvPr id="129" name="Text 63">
+            <a:extLst>
+              <a:ext uri="{FF2B5EF4-FFF2-40B4-BE49-F238E27FC236}">
+                <a16:creationId xmlns:a16="http://schemas.microsoft.com/office/drawing/2014/main" id="{8E0AC6F5-BE97-8D05-A55B-285F22A80A7F}"/>
+              </a:ext>
+            </a:extLst>
+          </p:cNvPr>
+          <p:cNvSpPr txBox="1"/>
+          <p:nvPr/>
+        </p:nvSpPr>
+        <p:spPr>
+          <a:xfrm>
+            <a:off x="8565185" y="5760720"/>
+            <a:ext cx="3017520" cy="365760"/>
+          </a:xfrm>
+          <a:prstGeom prst="rect">
+            <a:avLst/>
+          </a:prstGeom>
+          <a:noFill/>
+          <a:ln/>
+        </p:spPr>
+        <p:txBody>
+          <a:bodyPr wrap="square" lIns="0" tIns="0" rIns="0" bIns="0" rtlCol="0" anchor="ctr"/>
+          <a:lstStyle/>
+          <a:p>
             <a:pPr marL="0" indent="0">
               <a:buNone/>
             </a:pPr>
             <a:r>
-              <a:rPr lang="en-US" sz="1000" dirty="0">
+              <a:rPr lang="en-US" sz="1050" i="1" dirty="0">
                 <a:solidFill>
                   <a:srgbClr val="5B6B82"/>
                 </a:solidFill>
@@ -5702,52 +7100,183 @@
                 <a:ea typeface="Calibri" pitchFamily="34" charset="-122"/>
                 <a:cs typeface="Calibri" pitchFamily="34" charset="-120"/>
               </a:rPr>
+              <a:t>If a provider is unavailable, Compile shows a labelled fallback instead of failing.</a:t>
+            </a:r>
+            <a:endParaRPr lang="en-US" sz="1050" dirty="0"/>
+          </a:p>
+        </p:txBody>
+      </p:sp>
+      <p:sp>
+        <p:nvSpPr>
+          <p:cNvPr id="131" name="Text 64">
+            <a:extLst>
+              <a:ext uri="{FF2B5EF4-FFF2-40B4-BE49-F238E27FC236}">
+                <a16:creationId xmlns:a16="http://schemas.microsoft.com/office/drawing/2014/main" id="{66990FF3-CC61-5DDF-416D-DB71B7B68762}"/>
+              </a:ext>
+            </a:extLst>
+          </p:cNvPr>
+          <p:cNvSpPr txBox="1"/>
+          <p:nvPr/>
+        </p:nvSpPr>
+        <p:spPr>
+          <a:xfrm>
+            <a:off x="609905" y="6400800"/>
+            <a:ext cx="5486400" cy="228600"/>
+          </a:xfrm>
+          <a:prstGeom prst="rect">
+            <a:avLst/>
+          </a:prstGeom>
+          <a:noFill/>
+          <a:ln/>
+        </p:spPr>
+        <p:txBody>
+          <a:bodyPr wrap="square" lIns="0" tIns="0" rIns="0" bIns="0" rtlCol="0" anchor="ctr"/>
+          <a:lstStyle/>
+          <a:p>
+            <a:pPr marL="0" indent="0">
+              <a:buNone/>
+            </a:pPr>
+            <a:r>
+              <a:rPr lang="en-US" sz="900" dirty="0">
+                <a:solidFill>
+                  <a:srgbClr val="5B6B82"/>
+                </a:solidFill>
+                <a:latin typeface="Calibri" pitchFamily="34" charset="0"/>
+                <a:ea typeface="Calibri" pitchFamily="34" charset="-122"/>
+                <a:cs typeface="Calibri" pitchFamily="34" charset="-120"/>
+              </a:rPr>
               <a:t>Compile  ·  Blueprint AI  ·  Chaos2Commit 2026</a:t>
             </a:r>
-            <a:endParaRPr lang="en-US" sz="1000" dirty="0"/>
-          </a:p>
-        </p:txBody>
-      </p:sp>
-      <p:sp>
-        <p:nvSpPr>
-          <p:cNvPr id="34" name="Text 25"/>
-          <p:cNvSpPr txBox="1"/>
-          <p:nvPr/>
-        </p:nvSpPr>
-        <p:spPr>
-          <a:xfrm>
-            <a:off x="11183112" y="6400800"/>
-            <a:ext cx="457200" cy="274320"/>
-          </a:xfrm>
-          <a:prstGeom prst="rect">
-            <a:avLst/>
-          </a:prstGeom>
-          <a:noFill/>
-          <a:ln/>
-        </p:spPr>
-        <p:txBody>
-          <a:bodyPr wrap="square" lIns="0" tIns="0" rIns="0" bIns="0" rtlCol="0" anchor="ctr"/>
-          <a:lstStyle/>
-          <a:p>
-            <a:pPr marL="0" indent="0" algn="r">
-              <a:buNone/>
-            </a:pPr>
-            <a:r>
-              <a:rPr lang="en-US" sz="1000" dirty="0">
-                <a:solidFill>
-                  <a:srgbClr val="5B6B82"/>
-                </a:solidFill>
-                <a:latin typeface="Calibri" pitchFamily="34" charset="0"/>
-                <a:ea typeface="Calibri" pitchFamily="34" charset="-122"/>
-                <a:cs typeface="Calibri" pitchFamily="34" charset="-120"/>
-              </a:rPr>
-              <a:t>3</a:t>
-            </a:r>
-            <a:endParaRPr lang="en-US" sz="1000" dirty="0"/>
-          </a:p>
-        </p:txBody>
-      </p:sp>
+            <a:endParaRPr lang="en-US" sz="900" dirty="0"/>
+          </a:p>
+        </p:txBody>
+      </p:sp>
+      <p:pic>
+        <p:nvPicPr>
+          <p:cNvPr id="133" name="Image 0" descr="preencoded.png">
+            <a:extLst>
+              <a:ext uri="{FF2B5EF4-FFF2-40B4-BE49-F238E27FC236}">
+                <a16:creationId xmlns:a16="http://schemas.microsoft.com/office/drawing/2014/main" id="{004F78AE-7B9B-434A-8FC8-1E979524EB22}"/>
+              </a:ext>
+            </a:extLst>
+          </p:cNvPr>
+          <p:cNvPicPr>
+            <a:picLocks noChangeAspect="1"/>
+          </p:cNvPicPr>
+          <p:nvPr/>
+        </p:nvPicPr>
+        <p:blipFill>
+          <a:blip r:embed="rId2"/>
+          <a:stretch>
+            <a:fillRect/>
+          </a:stretch>
+        </p:blipFill>
+        <p:spPr>
+          <a:xfrm>
+            <a:off x="4377233" y="1623060"/>
+            <a:ext cx="210312" cy="210312"/>
+          </a:xfrm>
+          <a:prstGeom prst="rect">
+            <a:avLst/>
+          </a:prstGeom>
+        </p:spPr>
+      </p:pic>
+      <p:pic>
+        <p:nvPicPr>
+          <p:cNvPr id="135" name="Image 2" descr="preencoded.png">
+            <a:extLst>
+              <a:ext uri="{FF2B5EF4-FFF2-40B4-BE49-F238E27FC236}">
+                <a16:creationId xmlns:a16="http://schemas.microsoft.com/office/drawing/2014/main" id="{EBF9679A-B249-EFE9-1333-342BFB763EF9}"/>
+              </a:ext>
+            </a:extLst>
+          </p:cNvPr>
+          <p:cNvPicPr>
+            <a:picLocks noChangeAspect="1"/>
+          </p:cNvPicPr>
+          <p:nvPr/>
+        </p:nvPicPr>
+        <p:blipFill>
+          <a:blip r:embed="rId3"/>
+          <a:stretch>
+            <a:fillRect/>
+          </a:stretch>
+        </p:blipFill>
+        <p:spPr>
+          <a:xfrm>
+            <a:off x="6599225" y="1609344"/>
+            <a:ext cx="274320" cy="274320"/>
+          </a:xfrm>
+          <a:prstGeom prst="rect">
+            <a:avLst/>
+          </a:prstGeom>
+        </p:spPr>
+      </p:pic>
+      <p:pic>
+        <p:nvPicPr>
+          <p:cNvPr id="137" name="Image 4" descr="preencoded.png">
+            <a:extLst>
+              <a:ext uri="{FF2B5EF4-FFF2-40B4-BE49-F238E27FC236}">
+                <a16:creationId xmlns:a16="http://schemas.microsoft.com/office/drawing/2014/main" id="{EACABBB2-E36F-04F1-8556-AC739DDE61C1}"/>
+              </a:ext>
+            </a:extLst>
+          </p:cNvPr>
+          <p:cNvPicPr>
+            <a:picLocks noChangeAspect="1"/>
+          </p:cNvPicPr>
+          <p:nvPr/>
+        </p:nvPicPr>
+        <p:blipFill>
+          <a:blip r:embed="rId4"/>
+          <a:stretch>
+            <a:fillRect/>
+          </a:stretch>
+        </p:blipFill>
+        <p:spPr>
+          <a:xfrm>
+            <a:off x="8839505" y="1597914"/>
+            <a:ext cx="297180" cy="297180"/>
+          </a:xfrm>
+          <a:prstGeom prst="rect">
+            <a:avLst/>
+          </a:prstGeom>
+        </p:spPr>
+      </p:pic>
+      <p:pic>
+        <p:nvPicPr>
+          <p:cNvPr id="139" name="Image 6" descr="preencoded.png">
+            <a:extLst>
+              <a:ext uri="{FF2B5EF4-FFF2-40B4-BE49-F238E27FC236}">
+                <a16:creationId xmlns:a16="http://schemas.microsoft.com/office/drawing/2014/main" id="{0C40DFA0-175E-A826-FC4D-7E20A5087651}"/>
+              </a:ext>
+            </a:extLst>
+          </p:cNvPr>
+          <p:cNvPicPr>
+            <a:picLocks noChangeAspect="1"/>
+          </p:cNvPicPr>
+          <p:nvPr/>
+        </p:nvPicPr>
+        <p:blipFill>
+          <a:blip r:embed="rId5"/>
+          <a:stretch>
+            <a:fillRect/>
+          </a:stretch>
+        </p:blipFill>
+        <p:spPr>
+          <a:xfrm>
+            <a:off x="11184935" y="1623664"/>
+            <a:ext cx="260000" cy="260000"/>
+          </a:xfrm>
+          <a:prstGeom prst="rect">
+            <a:avLst/>
+          </a:prstGeom>
+        </p:spPr>
+      </p:pic>
     </p:spTree>
+    <p:extLst>
+      <p:ext uri="{BB962C8B-B14F-4D97-AF65-F5344CB8AC3E}">
+        <p14:creationId xmlns:p14="http://schemas.microsoft.com/office/powerpoint/2010/main" val="3331363574"/>
+      </p:ext>
+    </p:extLst>
   </p:cSld>
   <p:clrMapOvr>
     <a:masterClrMapping/>
